--- a/Foundation_F1/F1-L04_Complete_Alphabet_Short_Vowels.pptx
+++ b/Foundation_F1/F1-L04_Complete_Alphabet_Short_Vowels.pptx
@@ -527,7 +527,11 @@
           <a:lstStyle/>
           <a:p>
             <a:r>
-              <a:rPr lang="en-US" dirty="0"/>
+              <a:rPr lang="ar-SA" dirty="0">
+                <a:latin typeface="Amiri" pitchFamily="2" charset="-78"/>
+                <a:ea typeface="Amiri" pitchFamily="2" charset="-78"/>
+                <a:cs typeface="Amiri" pitchFamily="2" charset="-78"/>
+              </a:rPr>
               <a:t>LESSON AT A GLANCE — planned for 56 minutes, leaving about 4 minutes for Teams delays.
 0–1 Welcome · 1–2 Lesson map · 2–9 Do Now + answers · 9–10 Objectives · 10–20 New letters and sounds · 20–23 Quick check · 23–27 I Do (formation) · 27–38 We Do (listen, sort, detect) · 38–49 You Do (write, then show-and-say) · 49–54 Feedback · 54–56 Preparation.
 FLEX slides are optional. Use them if the class is moving quickly; otherwise the same activities are on the website for homework.
@@ -714,7 +718,11 @@
           <a:lstStyle/>
           <a:p>
             <a:r>
-              <a:rPr lang="en-US" dirty="0"/>
+              <a:rPr lang="ar-SA" dirty="0">
+                <a:latin typeface="Amiri" pitchFamily="2" charset="-78"/>
+                <a:ea typeface="Amiri" pitchFamily="2" charset="-78"/>
+                <a:cs typeface="Amiri" pitchFamily="2" charset="-78"/>
+              </a:rPr>
               <a:t>THE FOUR MARKS (website Part 4). The first three add a short vowel; sukūn shows that NO short vowel follows that consonant.
 Website accuracy point: sukūn is not a “silent letter” — the consonant is pronounced; it just has no vowel after it. In هَلْ the lām is heard and closes the syllable.
 Gestures: fatḥa = hand up and open (a); ḍamma = lips rounded (u); kasra = hand points down (i); sukūn = fist, stop.
@@ -984,7 +992,11 @@
           <a:lstStyle/>
           <a:p>
             <a:r>
-              <a:rPr lang="en-US" dirty="0"/>
+              <a:rPr lang="ar-SA" dirty="0">
+                <a:latin typeface="Amiri" pitchFamily="2" charset="-78"/>
+                <a:ea typeface="Amiri" pitchFamily="2" charset="-78"/>
+                <a:cs typeface="Amiri" pitchFamily="2" charset="-78"/>
+              </a:rPr>
               <a:t>I DO — FORMATION (5 min). Website: write each new letter four times, then check the baseline, dot placement and proportions. Positional forms are previewed only; F1-L05 teaches them.
 Then the website “four-way build”: choose a learned consonant and write it with fatḥa, ḍamma, kasra and sukūn (e.g. نَ نُ نِ نْ).</a:t>
             </a:r>
@@ -1249,7 +1261,11 @@
           <a:lstStyle/>
           <a:p>
             <a:r>
-              <a:rPr lang="en-US" dirty="0"/>
+              <a:rPr lang="ar-SA" dirty="0">
+                <a:latin typeface="Amiri" pitchFamily="2" charset="-78"/>
+                <a:ea typeface="Amiri" pitchFamily="2" charset="-78"/>
+                <a:cs typeface="Amiri" pitchFamily="2" charset="-78"/>
+              </a:rPr>
               <a:t>WE DO — website game “Connection Gate” (classify each final letter; pay special attention to wāw and yāʾ). Revision letters ا ر د added so the six breakers can be reviewed. Stretch: name all six breakers (ا د ذ ر ز و).</a:t>
             </a:r>
             <a:endParaRPr lang="en-US" dirty="0"/>
@@ -1337,7 +1353,11 @@
           <a:lstStyle/>
           <a:p>
             <a:r>
-              <a:rPr lang="en-US" dirty="0"/>
+              <a:rPr lang="ar-SA" dirty="0">
+                <a:latin typeface="Amiri" pitchFamily="2" charset="-78"/>
+                <a:ea typeface="Amiri" pitchFamily="2" charset="-78"/>
+                <a:cs typeface="Amiri" pitchFamily="2" charset="-78"/>
+              </a:rPr>
               <a:t>WE DO — website game “Connection Gate” (classify each final letter; pay special attention to wāw and yāʾ). Revision letters ا ر د added so the six breakers can be reviewed. Stretch: name all six breakers (ا د ذ ر ز و).</a:t>
             </a:r>
             <a:endParaRPr lang="en-US" dirty="0"/>
@@ -1425,7 +1445,11 @@
           <a:lstStyle/>
           <a:p>
             <a:r>
-              <a:rPr lang="en-US" dirty="0"/>
+              <a:rPr lang="ar-SA" dirty="0">
+                <a:latin typeface="Amiri" pitchFamily="2" charset="-78"/>
+                <a:ea typeface="Amiri" pitchFamily="2" charset="-78"/>
+                <a:cs typeface="Amiri" pitchFamily="2" charset="-78"/>
+              </a:rPr>
               <a:t>WE DO — website game “Diacritic Decoder” (name the short vowel or explain the sukūn) and the website lesson game (بَ بِ بُ). Read each item aloud together after answering.</a:t>
             </a:r>
             <a:endParaRPr lang="en-US" dirty="0"/>
@@ -1513,7 +1537,11 @@
           <a:lstStyle/>
           <a:p>
             <a:r>
-              <a:rPr lang="en-US" dirty="0"/>
+              <a:rPr lang="ar-SA" dirty="0">
+                <a:latin typeface="Amiri" pitchFamily="2" charset="-78"/>
+                <a:ea typeface="Amiri" pitchFamily="2" charset="-78"/>
+                <a:cs typeface="Amiri" pitchFamily="2" charset="-78"/>
+              </a:rPr>
               <a:t>WELCOME (1 min) — while students join.
 • Greet each student by name as they arrive: السَّلَامُ عَلَيْكُمْ. Take the register (Pastoral Tracker: attendance 0/1).
 • 2-MINUTE CHECK-IN (SEND training): a private chat to any student who seemed unsettled last lesson — “Are you okay today? 👍 / 👎”.
@@ -1606,7 +1634,11 @@
           <a:lstStyle/>
           <a:p>
             <a:r>
-              <a:rPr lang="en-US" dirty="0"/>
+              <a:rPr lang="ar-SA" dirty="0">
+                <a:latin typeface="Amiri" pitchFamily="2" charset="-78"/>
+                <a:ea typeface="Amiri" pitchFamily="2" charset="-78"/>
+                <a:cs typeface="Amiri" pitchFamily="2" charset="-78"/>
+              </a:rPr>
               <a:t>Reveal. Then chorally read the four website words: كَتَبَ · فَهِمَ · هُوَ · مِنْ.</a:t>
             </a:r>
             <a:endParaRPr lang="en-US" dirty="0"/>
@@ -1783,7 +1815,11 @@
           <a:lstStyle/>
           <a:p>
             <a:r>
-              <a:rPr lang="en-US" dirty="0"/>
+              <a:rPr lang="ar-SA" dirty="0">
+                <a:latin typeface="Amiri" pitchFamily="2" charset="-78"/>
+                <a:ea typeface="Amiri" pitchFamily="2" charset="-78"/>
+                <a:cs typeface="Amiri" pitchFamily="2" charset="-78"/>
+              </a:rPr>
               <a:t>YOU DO — WRITING (7 min) = the website homework (all 28 letters, circle the six breakers, write and read بَ بُ بِ بْ and one fully vowelled word) split by route. LIVE FEEDBACK after 3 minutes.</a:t>
             </a:r>
             <a:endParaRPr lang="en-US" dirty="0"/>
@@ -1871,7 +1907,11 @@
           <a:lstStyle/>
           <a:p>
             <a:r>
-              <a:rPr lang="en-US" dirty="0"/>
+              <a:rPr lang="ar-SA" dirty="0">
+                <a:latin typeface="Amiri" pitchFamily="2" charset="-78"/>
+                <a:ea typeface="Amiri" pitchFamily="2" charset="-78"/>
+                <a:cs typeface="Amiri" pitchFamily="2" charset="-78"/>
+              </a:rPr>
               <a:t>SPEAKING REHEARSAL (3 min) — website speaking prompts (the Core prompt is teacher-made). No breakout rooms (saves setup time).
 Sequence: ● 10s think → ↔ 45s everyone rehearses their answer aloud with mic muted → ◎ pairs on open mic: name two students (warned in advance); A asks, B answers; the rest of the class types one follow-up question in chat (+ / ?) → ↺ one student summarises the answer they heard.
 Routes: Core uses the Core prompt and stem; Develop the Develop prompts; Stretch the last prompt.
@@ -2319,7 +2359,11 @@
           <a:lstStyle/>
           <a:p>
             <a:r>
-              <a:rPr lang="en-US" dirty="0"/>
+              <a:rPr lang="ar-SA" dirty="0">
+                <a:latin typeface="Amiri" pitchFamily="2" charset="-78"/>
+                <a:ea typeface="Amiri" pitchFamily="2" charset="-78"/>
+                <a:cs typeface="Amiri" pitchFamily="2" charset="-78"/>
+              </a:rPr>
               <a:t>PREPARATION — flipped learning (2 min to explain).
 Next lesson (F1-L05 · One Letter, Four Positions) will spend class time USING this language, so students prepare it tonight — short, simple, easy to access (school guidance: “Simple, Short, Interesting, Relevant, Easy to access”). Next lesson: letters change shape at the start, middle and end of a word. Look at how ب changes in the three shapes above.
 Follow-up: the next Do Now tests two of these words (Flipped Learning: keep it short AND follow up).
@@ -2955,7 +2999,11 @@
           <a:lstStyle/>
           <a:p>
             <a:r>
-              <a:rPr lang="en-US" dirty="0"/>
+              <a:rPr lang="ar-SA" dirty="0">
+                <a:latin typeface="Amiri" pitchFamily="2" charset="-78"/>
+                <a:ea typeface="Amiri" pitchFamily="2" charset="-78"/>
+                <a:cs typeface="Amiri" pitchFamily="2" charset="-78"/>
+              </a:rPr>
               <a:t>LETTERS 23–28 (website Part 1). Standard alphabet positions 23–28; hamza is a separate writing sign.
 • ه hāʾ /h/ is a normal h — different from ح (deep breath, F1-L01).
 • ن nūn: one dot above a deep bowl — do not confuse with ب ت (they are flat).
@@ -3047,7 +3095,11 @@
           <a:lstStyle/>
           <a:p>
             <a:r>
-              <a:rPr lang="en-US" dirty="0"/>
+              <a:rPr lang="ar-SA" dirty="0">
+                <a:latin typeface="Amiri" pitchFamily="2" charset="-78"/>
+                <a:ea typeface="Amiri" pitchFamily="2" charset="-78"/>
+                <a:cs typeface="Amiri" pitchFamily="2" charset="-78"/>
+              </a:rPr>
               <a:t>WĀW AND YĀʾ (website Part 2): context and vowel marks show whether they are consonants or long-vowel carriers.
 The six connection breakers are now complete: ا د ذ ر ز و. “Breaker” means it does not connect to the FOLLOWING letter on its left — it can still join the letter before it (website).</a:t>
             </a:r>
@@ -3532,6 +3584,7 @@
                   <a:srgbClr val="D4AF37"/>
                 </a:solidFill>
                 <a:latin typeface="Amiri" pitchFamily="2" charset="-78"/>
+                <a:ea typeface="Amiri" pitchFamily="2" charset="-78"/>
                 <a:cs typeface="Amiri" pitchFamily="2" charset="-78"/>
               </a:rPr>
               <a:t>م</a:t>
@@ -3738,6 +3791,7 @@
                   <a:srgbClr val="D4AF37"/>
                 </a:solidFill>
                 <a:latin typeface="Amiri" pitchFamily="2" charset="-78"/>
+                <a:ea typeface="Amiri" pitchFamily="2" charset="-78"/>
                 <a:cs typeface="Amiri" pitchFamily="2" charset="-78"/>
               </a:rPr>
               <a:t>أَكْمِلِ الحُرُوفَ وَاقْرَأِ الحَرَكَاتِ</a:t>
@@ -3789,6 +3843,7 @@
                   <a:srgbClr val="C6D2E6"/>
                 </a:solidFill>
                 <a:latin typeface="Amiri" pitchFamily="2" charset="-78"/>
+                <a:ea typeface="Amiri" pitchFamily="2" charset="-78"/>
                 <a:cs typeface="Amiri" pitchFamily="2" charset="-78"/>
               </a:rPr>
               <a:t>ل م ن ه و ي</a:t>
@@ -3815,6 +3870,7 @@
                   <a:srgbClr val="C6D2E6"/>
                 </a:solidFill>
                 <a:latin typeface="Amiri" pitchFamily="2" charset="-78"/>
+                <a:ea typeface="Amiri" pitchFamily="2" charset="-78"/>
                 <a:cs typeface="Amiri" pitchFamily="2" charset="-78"/>
               </a:rPr>
               <a:t>و</a:t>
@@ -4247,6 +4303,7 @@
                   <a:srgbClr val="D4AF37"/>
                 </a:solidFill>
                 <a:latin typeface="Amiri" pitchFamily="2" charset="-78"/>
+                <a:ea typeface="Amiri" pitchFamily="2" charset="-78"/>
                 <a:cs typeface="Amiri" pitchFamily="2" charset="-78"/>
               </a:rPr>
               <a:t>م</a:t>
@@ -4542,6 +4599,7 @@
                   <a:srgbClr val="1B3B6F"/>
                 </a:solidFill>
                 <a:latin typeface="Amiri" pitchFamily="2" charset="-78"/>
+                <a:ea typeface="Amiri" pitchFamily="2" charset="-78"/>
                 <a:cs typeface="Amiri" pitchFamily="2" charset="-78"/>
               </a:rPr>
               <a:t>لا</a:t>
@@ -4568,6 +4626,7 @@
                   <a:srgbClr val="1B3B6F"/>
                 </a:solidFill>
                 <a:latin typeface="Amiri" pitchFamily="2" charset="-78"/>
+                <a:ea typeface="Amiri" pitchFamily="2" charset="-78"/>
                 <a:cs typeface="Amiri" pitchFamily="2" charset="-78"/>
               </a:rPr>
               <a:t>ء</a:t>
@@ -4606,6 +4665,7 @@
                   <a:srgbClr val="8A6D1E"/>
                 </a:solidFill>
                 <a:latin typeface="Amiri" pitchFamily="2" charset="-78"/>
+                <a:ea typeface="Amiri" pitchFamily="2" charset="-78"/>
                 <a:cs typeface="Amiri" pitchFamily="2" charset="-78"/>
               </a:rPr>
               <a:t>لَامُ أَلِفٍ وَالهَمْزَةُ</a:t>
@@ -4781,6 +4841,7 @@
                   <a:srgbClr val="8A6D1E"/>
                 </a:solidFill>
                 <a:latin typeface="Amiri" pitchFamily="2" charset="-78"/>
+                <a:ea typeface="Amiri" pitchFamily="2" charset="-78"/>
                 <a:cs typeface="Amiri" pitchFamily="2" charset="-78"/>
               </a:rPr>
               <a:t>ل + ا ← لا</a:t>
@@ -4819,6 +4880,7 @@
                   <a:srgbClr val="1B3B6F"/>
                 </a:solidFill>
                 <a:latin typeface="Amiri" pitchFamily="2" charset="-78"/>
+                <a:ea typeface="Amiri" pitchFamily="2" charset="-78"/>
                 <a:cs typeface="Amiri" pitchFamily="2" charset="-78"/>
               </a:rPr>
               <a:t>لَا</a:t>
@@ -4935,6 +4997,7 @@
                   <a:srgbClr val="1F2A37"/>
                 </a:solidFill>
                 <a:latin typeface="Amiri" pitchFamily="2" charset="-78"/>
+                <a:ea typeface="Amiri" pitchFamily="2" charset="-78"/>
                 <a:cs typeface="Amiri" pitchFamily="2" charset="-78"/>
               </a:rPr>
               <a:t>سَلَامٌ</a:t>
@@ -5085,6 +5148,7 @@
                   <a:srgbClr val="8A6D1E"/>
                 </a:solidFill>
                 <a:latin typeface="Amiri" pitchFamily="2" charset="-78"/>
+                <a:ea typeface="Amiri" pitchFamily="2" charset="-78"/>
                 <a:cs typeface="Amiri" pitchFamily="2" charset="-78"/>
               </a:rPr>
               <a:t>ء /ʔ/</a:t>
@@ -5123,6 +5187,7 @@
                   <a:srgbClr val="1B3B6F"/>
                 </a:solidFill>
                 <a:latin typeface="Amiri" pitchFamily="2" charset="-78"/>
+                <a:ea typeface="Amiri" pitchFamily="2" charset="-78"/>
                 <a:cs typeface="Amiri" pitchFamily="2" charset="-78"/>
               </a:rPr>
               <a:t>ء  أ  ؤ  ئ</a:t>
@@ -5363,6 +5428,7 @@
                   <a:srgbClr val="8A6D1E"/>
                 </a:solidFill>
                 <a:latin typeface="Amiri" pitchFamily="2" charset="-78"/>
+                <a:ea typeface="Amiri" pitchFamily="2" charset="-78"/>
                 <a:cs typeface="Amiri" pitchFamily="2" charset="-78"/>
               </a:rPr>
               <a:t>الله</a:t>
@@ -5401,6 +5467,7 @@
                   <a:srgbClr val="1B3B6F"/>
                 </a:solidFill>
                 <a:latin typeface="Amiri" pitchFamily="2" charset="-78"/>
+                <a:ea typeface="Amiri" pitchFamily="2" charset="-78"/>
                 <a:cs typeface="Amiri" pitchFamily="2" charset="-78"/>
               </a:rPr>
               <a:t>الله</a:t>
@@ -5452,6 +5519,7 @@
                   <a:srgbClr val="5A6472"/>
                 </a:solidFill>
                 <a:latin typeface="Amiri" pitchFamily="2" charset="-78"/>
+                <a:ea typeface="Amiri" pitchFamily="2" charset="-78"/>
                 <a:cs typeface="Amiri" pitchFamily="2" charset="-78"/>
               </a:rPr>
               <a:t>لا</a:t>
@@ -5663,6 +5731,7 @@
                   <a:srgbClr val="D4AF37"/>
                 </a:solidFill>
                 <a:latin typeface="Amiri" pitchFamily="2" charset="-78"/>
+                <a:ea typeface="Amiri" pitchFamily="2" charset="-78"/>
                 <a:cs typeface="Amiri" pitchFamily="2" charset="-78"/>
               </a:rPr>
               <a:t>م</a:t>
@@ -5983,6 +6052,7 @@
                   <a:srgbClr val="8A6D1E"/>
                 </a:solidFill>
                 <a:latin typeface="Amiri" pitchFamily="2" charset="-78"/>
+                <a:ea typeface="Amiri" pitchFamily="2" charset="-78"/>
                 <a:cs typeface="Amiri" pitchFamily="2" charset="-78"/>
               </a:rPr>
               <a:t>الحَرَكَاتُ القَصِيرَةُ وَالسُّكُونُ</a:t>
@@ -6173,6 +6243,7 @@
                   <a:srgbClr val="FFFFFF"/>
                 </a:solidFill>
                 <a:latin typeface="Amiri" pitchFamily="2" charset="-78"/>
+                <a:ea typeface="Amiri" pitchFamily="2" charset="-78"/>
                 <a:cs typeface="Amiri" pitchFamily="2" charset="-78"/>
               </a:rPr>
               <a:t>ب</a:t>
@@ -6327,6 +6398,7 @@
                   <a:srgbClr val="5A6472"/>
                 </a:solidFill>
                 <a:latin typeface="Amiri" pitchFamily="2" charset="-78"/>
+                <a:ea typeface="Amiri" pitchFamily="2" charset="-78"/>
                 <a:cs typeface="Amiri" pitchFamily="2" charset="-78"/>
               </a:rPr>
               <a:t>فَتْحَةٌ</a:t>
@@ -6403,6 +6475,7 @@
                   <a:srgbClr val="1B3B6F"/>
                 </a:solidFill>
                 <a:latin typeface="Amiri" pitchFamily="2" charset="-78"/>
+                <a:ea typeface="Amiri" pitchFamily="2" charset="-78"/>
                 <a:cs typeface="Amiri" pitchFamily="2" charset="-78"/>
               </a:rPr>
               <a:t>بَ</a:t>
@@ -6479,6 +6552,7 @@
                   <a:srgbClr val="1B3B6F"/>
                 </a:solidFill>
                 <a:latin typeface="Amiri" pitchFamily="2" charset="-78"/>
+                <a:ea typeface="Amiri" pitchFamily="2" charset="-78"/>
                 <a:cs typeface="Amiri" pitchFamily="2" charset="-78"/>
               </a:rPr>
               <a:t>كَتَبَ</a:t>
@@ -6660,6 +6734,7 @@
                   <a:srgbClr val="5A6472"/>
                 </a:solidFill>
                 <a:latin typeface="Amiri" pitchFamily="2" charset="-78"/>
+                <a:ea typeface="Amiri" pitchFamily="2" charset="-78"/>
                 <a:cs typeface="Amiri" pitchFamily="2" charset="-78"/>
               </a:rPr>
               <a:t>ضَمَّةٌ</a:t>
@@ -6736,6 +6811,7 @@
                   <a:srgbClr val="1B3B6F"/>
                 </a:solidFill>
                 <a:latin typeface="Amiri" pitchFamily="2" charset="-78"/>
+                <a:ea typeface="Amiri" pitchFamily="2" charset="-78"/>
                 <a:cs typeface="Amiri" pitchFamily="2" charset="-78"/>
               </a:rPr>
               <a:t>بُ</a:t>
@@ -6812,6 +6888,7 @@
                   <a:srgbClr val="1B3B6F"/>
                 </a:solidFill>
                 <a:latin typeface="Amiri" pitchFamily="2" charset="-78"/>
+                <a:ea typeface="Amiri" pitchFamily="2" charset="-78"/>
                 <a:cs typeface="Amiri" pitchFamily="2" charset="-78"/>
               </a:rPr>
               <a:t>هُوَ</a:t>
@@ -6993,6 +7070,7 @@
                   <a:srgbClr val="5A6472"/>
                 </a:solidFill>
                 <a:latin typeface="Amiri" pitchFamily="2" charset="-78"/>
+                <a:ea typeface="Amiri" pitchFamily="2" charset="-78"/>
                 <a:cs typeface="Amiri" pitchFamily="2" charset="-78"/>
               </a:rPr>
               <a:t>كَسْرَةٌ</a:t>
@@ -7069,6 +7147,7 @@
                   <a:srgbClr val="1B3B6F"/>
                 </a:solidFill>
                 <a:latin typeface="Amiri" pitchFamily="2" charset="-78"/>
+                <a:ea typeface="Amiri" pitchFamily="2" charset="-78"/>
                 <a:cs typeface="Amiri" pitchFamily="2" charset="-78"/>
               </a:rPr>
               <a:t>بِ</a:t>
@@ -7145,6 +7224,7 @@
                   <a:srgbClr val="1B3B6F"/>
                 </a:solidFill>
                 <a:latin typeface="Amiri" pitchFamily="2" charset="-78"/>
+                <a:ea typeface="Amiri" pitchFamily="2" charset="-78"/>
                 <a:cs typeface="Amiri" pitchFamily="2" charset="-78"/>
               </a:rPr>
               <a:t>فَهِمَ</a:t>
@@ -7326,6 +7406,7 @@
                   <a:srgbClr val="5A6472"/>
                 </a:solidFill>
                 <a:latin typeface="Amiri" pitchFamily="2" charset="-78"/>
+                <a:ea typeface="Amiri" pitchFamily="2" charset="-78"/>
                 <a:cs typeface="Amiri" pitchFamily="2" charset="-78"/>
               </a:rPr>
               <a:t>سُكُونٌ</a:t>
@@ -7402,6 +7483,7 @@
                   <a:srgbClr val="1B3B6F"/>
                 </a:solidFill>
                 <a:latin typeface="Amiri" pitchFamily="2" charset="-78"/>
+                <a:ea typeface="Amiri" pitchFamily="2" charset="-78"/>
                 <a:cs typeface="Amiri" pitchFamily="2" charset="-78"/>
               </a:rPr>
               <a:t>بْ</a:t>
@@ -7478,6 +7560,7 @@
                   <a:srgbClr val="1B3B6F"/>
                 </a:solidFill>
                 <a:latin typeface="Amiri" pitchFamily="2" charset="-78"/>
+                <a:ea typeface="Amiri" pitchFamily="2" charset="-78"/>
                 <a:cs typeface="Amiri" pitchFamily="2" charset="-78"/>
               </a:rPr>
               <a:t>مِنْ</a:t>
@@ -7714,6 +7797,7 @@
                   <a:srgbClr val="D4AF37"/>
                 </a:solidFill>
                 <a:latin typeface="Amiri" pitchFamily="2" charset="-78"/>
+                <a:ea typeface="Amiri" pitchFamily="2" charset="-78"/>
                 <a:cs typeface="Amiri" pitchFamily="2" charset="-78"/>
               </a:rPr>
               <a:t>م</a:t>
@@ -8034,6 +8118,7 @@
                   <a:srgbClr val="8A6D1E"/>
                 </a:solidFill>
                 <a:latin typeface="Amiri" pitchFamily="2" charset="-78"/>
+                <a:ea typeface="Amiri" pitchFamily="2" charset="-78"/>
                 <a:cs typeface="Amiri" pitchFamily="2" charset="-78"/>
               </a:rPr>
               <a:t>فَحْصٌ سَرِيعٌ</a:t>
@@ -8308,6 +8393,7 @@
                   <a:srgbClr val="1F2A37"/>
                 </a:solidFill>
                 <a:latin typeface="Amiri" pitchFamily="2" charset="-78"/>
+                <a:ea typeface="Amiri" pitchFamily="2" charset="-78"/>
                 <a:cs typeface="Amiri" pitchFamily="2" charset="-78"/>
               </a:rPr>
               <a:t>و</a:t>
@@ -8409,6 +8495,7 @@
                   <a:srgbClr val="1F2A37"/>
                 </a:solidFill>
                 <a:latin typeface="Amiri" pitchFamily="2" charset="-78"/>
+                <a:ea typeface="Amiri" pitchFamily="2" charset="-78"/>
                 <a:cs typeface="Amiri" pitchFamily="2" charset="-78"/>
               </a:rPr>
               <a:t>ء</a:t>
@@ -8510,6 +8597,7 @@
                   <a:srgbClr val="1F2A37"/>
                 </a:solidFill>
                 <a:latin typeface="Amiri" pitchFamily="2" charset="-78"/>
+                <a:ea typeface="Amiri" pitchFamily="2" charset="-78"/>
                 <a:cs typeface="Amiri" pitchFamily="2" charset="-78"/>
               </a:rPr>
               <a:t>ي</a:t>
@@ -8746,6 +8834,7 @@
                   <a:srgbClr val="1F2A37"/>
                 </a:solidFill>
                 <a:latin typeface="Amiri" pitchFamily="2" charset="-78"/>
+                <a:ea typeface="Amiri" pitchFamily="2" charset="-78"/>
                 <a:cs typeface="Amiri" pitchFamily="2" charset="-78"/>
               </a:rPr>
               <a:t>و</a:t>
@@ -8847,6 +8936,7 @@
                   <a:srgbClr val="1F2A37"/>
                 </a:solidFill>
                 <a:latin typeface="Amiri" pitchFamily="2" charset="-78"/>
+                <a:ea typeface="Amiri" pitchFamily="2" charset="-78"/>
                 <a:cs typeface="Amiri" pitchFamily="2" charset="-78"/>
               </a:rPr>
               <a:t>ه</a:t>
@@ -8948,6 +9038,7 @@
                   <a:srgbClr val="1F2A37"/>
                 </a:solidFill>
                 <a:latin typeface="Amiri" pitchFamily="2" charset="-78"/>
+                <a:ea typeface="Amiri" pitchFamily="2" charset="-78"/>
                 <a:cs typeface="Amiri" pitchFamily="2" charset="-78"/>
               </a:rPr>
               <a:t>ي</a:t>
@@ -9096,6 +9187,7 @@
                   <a:srgbClr val="1B3B6F"/>
                 </a:solidFill>
                 <a:latin typeface="Amiri" pitchFamily="2" charset="-78"/>
+                <a:ea typeface="Amiri" pitchFamily="2" charset="-78"/>
                 <a:cs typeface="Amiri" pitchFamily="2" charset="-78"/>
               </a:rPr>
               <a:t>مُ</a:t>
@@ -9547,6 +9639,7 @@
                   <a:srgbClr val="1B3B6F"/>
                 </a:solidFill>
                 <a:latin typeface="Amiri" pitchFamily="2" charset="-78"/>
+                <a:ea typeface="Amiri" pitchFamily="2" charset="-78"/>
                 <a:cs typeface="Amiri" pitchFamily="2" charset="-78"/>
               </a:rPr>
               <a:t>نِ</a:t>
@@ -9983,6 +10076,7 @@
                   <a:srgbClr val="D4AF37"/>
                 </a:solidFill>
                 <a:latin typeface="Amiri" pitchFamily="2" charset="-78"/>
+                <a:ea typeface="Amiri" pitchFamily="2" charset="-78"/>
                 <a:cs typeface="Amiri" pitchFamily="2" charset="-78"/>
               </a:rPr>
               <a:t>م</a:t>
@@ -10303,6 +10397,7 @@
                   <a:srgbClr val="8A6D1E"/>
                 </a:solidFill>
                 <a:latin typeface="Amiri" pitchFamily="2" charset="-78"/>
+                <a:ea typeface="Amiri" pitchFamily="2" charset="-78"/>
                 <a:cs typeface="Amiri" pitchFamily="2" charset="-78"/>
               </a:rPr>
               <a:t>الإِجَابَاتُ وَالتَّعْلِيلُ</a:t>
@@ -10577,6 +10672,7 @@
                   <a:srgbClr val="9AA1AB"/>
                 </a:solidFill>
                 <a:latin typeface="Amiri" pitchFamily="2" charset="-78"/>
+                <a:ea typeface="Amiri" pitchFamily="2" charset="-78"/>
                 <a:cs typeface="Amiri" pitchFamily="2" charset="-78"/>
               </a:rPr>
               <a:t>و</a:t>
@@ -10678,6 +10774,7 @@
                   <a:srgbClr val="9AA1AB"/>
                 </a:solidFill>
                 <a:latin typeface="Amiri" pitchFamily="2" charset="-78"/>
+                <a:ea typeface="Amiri" pitchFamily="2" charset="-78"/>
                 <a:cs typeface="Amiri" pitchFamily="2" charset="-78"/>
               </a:rPr>
               <a:t>ء</a:t>
@@ -10806,6 +10903,7 @@
                   <a:srgbClr val="1F2A37"/>
                 </a:solidFill>
                 <a:latin typeface="Amiri" pitchFamily="2" charset="-78"/>
+                <a:ea typeface="Amiri" pitchFamily="2" charset="-78"/>
                 <a:cs typeface="Amiri" pitchFamily="2" charset="-78"/>
               </a:rPr>
               <a:t>ي</a:t>
@@ -10844,6 +10942,7 @@
                   <a:srgbClr val="8A6D1E"/>
                 </a:solidFill>
                 <a:latin typeface="Amiri" pitchFamily="2" charset="-78"/>
+                <a:ea typeface="Amiri" pitchFamily="2" charset="-78"/>
                 <a:cs typeface="Amiri" pitchFamily="2" charset="-78"/>
               </a:rPr>
               <a:t>ي</a:t>
@@ -11120,6 +11219,7 @@
                   <a:srgbClr val="1F2A37"/>
                 </a:solidFill>
                 <a:latin typeface="Amiri" pitchFamily="2" charset="-78"/>
+                <a:ea typeface="Amiri" pitchFamily="2" charset="-78"/>
                 <a:cs typeface="Amiri" pitchFamily="2" charset="-78"/>
               </a:rPr>
               <a:t>و</a:t>
@@ -11221,6 +11321,7 @@
                   <a:srgbClr val="9AA1AB"/>
                 </a:solidFill>
                 <a:latin typeface="Amiri" pitchFamily="2" charset="-78"/>
+                <a:ea typeface="Amiri" pitchFamily="2" charset="-78"/>
                 <a:cs typeface="Amiri" pitchFamily="2" charset="-78"/>
               </a:rPr>
               <a:t>ه</a:t>
@@ -11322,6 +11423,7 @@
                   <a:srgbClr val="9AA1AB"/>
                 </a:solidFill>
                 <a:latin typeface="Amiri" pitchFamily="2" charset="-78"/>
+                <a:ea typeface="Amiri" pitchFamily="2" charset="-78"/>
                 <a:cs typeface="Amiri" pitchFamily="2" charset="-78"/>
               </a:rPr>
               <a:t>ي</a:t>
@@ -11360,6 +11462,7 @@
                   <a:srgbClr val="8A6D1E"/>
                 </a:solidFill>
                 <a:latin typeface="Amiri" pitchFamily="2" charset="-78"/>
+                <a:ea typeface="Amiri" pitchFamily="2" charset="-78"/>
                 <a:cs typeface="Amiri" pitchFamily="2" charset="-78"/>
               </a:rPr>
               <a:t>و</a:t>
@@ -11521,6 +11624,7 @@
                   <a:srgbClr val="1B3B6F"/>
                 </a:solidFill>
                 <a:latin typeface="Amiri" pitchFamily="2" charset="-78"/>
+                <a:ea typeface="Amiri" pitchFamily="2" charset="-78"/>
                 <a:cs typeface="Amiri" pitchFamily="2" charset="-78"/>
               </a:rPr>
               <a:t>مُ</a:t>
@@ -12037,6 +12141,7 @@
                   <a:srgbClr val="1B3B6F"/>
                 </a:solidFill>
                 <a:latin typeface="Amiri" pitchFamily="2" charset="-78"/>
+                <a:ea typeface="Amiri" pitchFamily="2" charset="-78"/>
                 <a:cs typeface="Amiri" pitchFamily="2" charset="-78"/>
               </a:rPr>
               <a:t>نِ</a:t>
@@ -12538,6 +12643,7 @@
                   <a:srgbClr val="D4AF37"/>
                 </a:solidFill>
                 <a:latin typeface="Amiri" pitchFamily="2" charset="-78"/>
+                <a:ea typeface="Amiri" pitchFamily="2" charset="-78"/>
                 <a:cs typeface="Amiri" pitchFamily="2" charset="-78"/>
               </a:rPr>
               <a:t>م</a:t>
@@ -12858,6 +12964,7 @@
                   <a:srgbClr val="8A6D1E"/>
                 </a:solidFill>
                 <a:latin typeface="Amiri" pitchFamily="2" charset="-78"/>
+                <a:ea typeface="Amiri" pitchFamily="2" charset="-78"/>
                 <a:cs typeface="Amiri" pitchFamily="2" charset="-78"/>
               </a:rPr>
               <a:t>شَاهِدْ ثُمَّ اُكْتُبْ</a:t>
@@ -12968,6 +13075,7 @@
                   <a:srgbClr val="1B3B6F"/>
                 </a:solidFill>
                 <a:latin typeface="Amiri" pitchFamily="2" charset="-78"/>
+                <a:ea typeface="Amiri" pitchFamily="2" charset="-78"/>
                 <a:cs typeface="Amiri" pitchFamily="2" charset="-78"/>
               </a:rPr>
               <a:t>ل</a:t>
@@ -13006,6 +13114,7 @@
                   <a:srgbClr val="0E7C86"/>
                 </a:solidFill>
                 <a:latin typeface="Amiri" pitchFamily="2" charset="-78"/>
+                <a:ea typeface="Amiri" pitchFamily="2" charset="-78"/>
                 <a:cs typeface="Amiri" pitchFamily="2" charset="-78"/>
               </a:rPr>
               <a:t>لَام</a:t>
@@ -13269,6 +13378,7 @@
                   <a:srgbClr val="D8CFBD"/>
                 </a:solidFill>
                 <a:latin typeface="Amiri" pitchFamily="2" charset="-78"/>
+                <a:ea typeface="Amiri" pitchFamily="2" charset="-78"/>
                 <a:cs typeface="Amiri" pitchFamily="2" charset="-78"/>
               </a:rPr>
               <a:t>ل</a:t>
@@ -13307,6 +13417,7 @@
                   <a:srgbClr val="D8CFBD"/>
                 </a:solidFill>
                 <a:latin typeface="Amiri" pitchFamily="2" charset="-78"/>
+                <a:ea typeface="Amiri" pitchFamily="2" charset="-78"/>
                 <a:cs typeface="Amiri" pitchFamily="2" charset="-78"/>
               </a:rPr>
               <a:t>ل</a:t>
@@ -13345,6 +13456,7 @@
                   <a:srgbClr val="D8CFBD"/>
                 </a:solidFill>
                 <a:latin typeface="Amiri" pitchFamily="2" charset="-78"/>
+                <a:ea typeface="Amiri" pitchFamily="2" charset="-78"/>
                 <a:cs typeface="Amiri" pitchFamily="2" charset="-78"/>
               </a:rPr>
               <a:t>ل</a:t>
@@ -13493,6 +13605,7 @@
                   <a:srgbClr val="1B3B6F"/>
                 </a:solidFill>
                 <a:latin typeface="Amiri" pitchFamily="2" charset="-78"/>
+                <a:ea typeface="Amiri" pitchFamily="2" charset="-78"/>
                 <a:cs typeface="Amiri" pitchFamily="2" charset="-78"/>
               </a:rPr>
               <a:t>م</a:t>
@@ -13531,6 +13644,7 @@
                   <a:srgbClr val="0E7C86"/>
                 </a:solidFill>
                 <a:latin typeface="Amiri" pitchFamily="2" charset="-78"/>
+                <a:ea typeface="Amiri" pitchFamily="2" charset="-78"/>
                 <a:cs typeface="Amiri" pitchFamily="2" charset="-78"/>
               </a:rPr>
               <a:t>مِيم</a:t>
@@ -13794,6 +13908,7 @@
                   <a:srgbClr val="D8CFBD"/>
                 </a:solidFill>
                 <a:latin typeface="Amiri" pitchFamily="2" charset="-78"/>
+                <a:ea typeface="Amiri" pitchFamily="2" charset="-78"/>
                 <a:cs typeface="Amiri" pitchFamily="2" charset="-78"/>
               </a:rPr>
               <a:t>م</a:t>
@@ -13832,6 +13947,7 @@
                   <a:srgbClr val="D8CFBD"/>
                 </a:solidFill>
                 <a:latin typeface="Amiri" pitchFamily="2" charset="-78"/>
+                <a:ea typeface="Amiri" pitchFamily="2" charset="-78"/>
                 <a:cs typeface="Amiri" pitchFamily="2" charset="-78"/>
               </a:rPr>
               <a:t>م</a:t>
@@ -13870,6 +13986,7 @@
                   <a:srgbClr val="D8CFBD"/>
                 </a:solidFill>
                 <a:latin typeface="Amiri" pitchFamily="2" charset="-78"/>
+                <a:ea typeface="Amiri" pitchFamily="2" charset="-78"/>
                 <a:cs typeface="Amiri" pitchFamily="2" charset="-78"/>
               </a:rPr>
               <a:t>م</a:t>
@@ -14018,6 +14135,7 @@
                   <a:srgbClr val="1B3B6F"/>
                 </a:solidFill>
                 <a:latin typeface="Amiri" pitchFamily="2" charset="-78"/>
+                <a:ea typeface="Amiri" pitchFamily="2" charset="-78"/>
                 <a:cs typeface="Amiri" pitchFamily="2" charset="-78"/>
               </a:rPr>
               <a:t>ن</a:t>
@@ -14056,6 +14174,7 @@
                   <a:srgbClr val="0E7C86"/>
                 </a:solidFill>
                 <a:latin typeface="Amiri" pitchFamily="2" charset="-78"/>
+                <a:ea typeface="Amiri" pitchFamily="2" charset="-78"/>
                 <a:cs typeface="Amiri" pitchFamily="2" charset="-78"/>
               </a:rPr>
               <a:t>نُون</a:t>
@@ -14319,6 +14438,7 @@
                   <a:srgbClr val="D8CFBD"/>
                 </a:solidFill>
                 <a:latin typeface="Amiri" pitchFamily="2" charset="-78"/>
+                <a:ea typeface="Amiri" pitchFamily="2" charset="-78"/>
                 <a:cs typeface="Amiri" pitchFamily="2" charset="-78"/>
               </a:rPr>
               <a:t>ن</a:t>
@@ -14357,6 +14477,7 @@
                   <a:srgbClr val="D8CFBD"/>
                 </a:solidFill>
                 <a:latin typeface="Amiri" pitchFamily="2" charset="-78"/>
+                <a:ea typeface="Amiri" pitchFamily="2" charset="-78"/>
                 <a:cs typeface="Amiri" pitchFamily="2" charset="-78"/>
               </a:rPr>
               <a:t>ن</a:t>
@@ -14395,6 +14516,7 @@
                   <a:srgbClr val="D8CFBD"/>
                 </a:solidFill>
                 <a:latin typeface="Amiri" pitchFamily="2" charset="-78"/>
+                <a:ea typeface="Amiri" pitchFamily="2" charset="-78"/>
                 <a:cs typeface="Amiri" pitchFamily="2" charset="-78"/>
               </a:rPr>
               <a:t>ن</a:t>
@@ -14543,6 +14665,7 @@
                   <a:srgbClr val="1B3B6F"/>
                 </a:solidFill>
                 <a:latin typeface="Amiri" pitchFamily="2" charset="-78"/>
+                <a:ea typeface="Amiri" pitchFamily="2" charset="-78"/>
                 <a:cs typeface="Amiri" pitchFamily="2" charset="-78"/>
               </a:rPr>
               <a:t>ه</a:t>
@@ -14581,6 +14704,7 @@
                   <a:srgbClr val="0E7C86"/>
                 </a:solidFill>
                 <a:latin typeface="Amiri" pitchFamily="2" charset="-78"/>
+                <a:ea typeface="Amiri" pitchFamily="2" charset="-78"/>
                 <a:cs typeface="Amiri" pitchFamily="2" charset="-78"/>
               </a:rPr>
               <a:t>هَاء</a:t>
@@ -14844,6 +14968,7 @@
                   <a:srgbClr val="D8CFBD"/>
                 </a:solidFill>
                 <a:latin typeface="Amiri" pitchFamily="2" charset="-78"/>
+                <a:ea typeface="Amiri" pitchFamily="2" charset="-78"/>
                 <a:cs typeface="Amiri" pitchFamily="2" charset="-78"/>
               </a:rPr>
               <a:t>ه</a:t>
@@ -14882,6 +15007,7 @@
                   <a:srgbClr val="D8CFBD"/>
                 </a:solidFill>
                 <a:latin typeface="Amiri" pitchFamily="2" charset="-78"/>
+                <a:ea typeface="Amiri" pitchFamily="2" charset="-78"/>
                 <a:cs typeface="Amiri" pitchFamily="2" charset="-78"/>
               </a:rPr>
               <a:t>ه</a:t>
@@ -14920,6 +15046,7 @@
                   <a:srgbClr val="D8CFBD"/>
                 </a:solidFill>
                 <a:latin typeface="Amiri" pitchFamily="2" charset="-78"/>
+                <a:ea typeface="Amiri" pitchFamily="2" charset="-78"/>
                 <a:cs typeface="Amiri" pitchFamily="2" charset="-78"/>
               </a:rPr>
               <a:t>ه</a:t>
@@ -15068,6 +15195,7 @@
                   <a:srgbClr val="1B3B6F"/>
                 </a:solidFill>
                 <a:latin typeface="Amiri" pitchFamily="2" charset="-78"/>
+                <a:ea typeface="Amiri" pitchFamily="2" charset="-78"/>
                 <a:cs typeface="Amiri" pitchFamily="2" charset="-78"/>
               </a:rPr>
               <a:t>و</a:t>
@@ -15106,6 +15234,7 @@
                   <a:srgbClr val="0E7C86"/>
                 </a:solidFill>
                 <a:latin typeface="Amiri" pitchFamily="2" charset="-78"/>
+                <a:ea typeface="Amiri" pitchFamily="2" charset="-78"/>
                 <a:cs typeface="Amiri" pitchFamily="2" charset="-78"/>
               </a:rPr>
               <a:t>وَاو</a:t>
@@ -15369,6 +15498,7 @@
                   <a:srgbClr val="D8CFBD"/>
                 </a:solidFill>
                 <a:latin typeface="Amiri" pitchFamily="2" charset="-78"/>
+                <a:ea typeface="Amiri" pitchFamily="2" charset="-78"/>
                 <a:cs typeface="Amiri" pitchFamily="2" charset="-78"/>
               </a:rPr>
               <a:t>و</a:t>
@@ -15407,6 +15537,7 @@
                   <a:srgbClr val="D8CFBD"/>
                 </a:solidFill>
                 <a:latin typeface="Amiri" pitchFamily="2" charset="-78"/>
+                <a:ea typeface="Amiri" pitchFamily="2" charset="-78"/>
                 <a:cs typeface="Amiri" pitchFamily="2" charset="-78"/>
               </a:rPr>
               <a:t>و</a:t>
@@ -15445,6 +15576,7 @@
                   <a:srgbClr val="D8CFBD"/>
                 </a:solidFill>
                 <a:latin typeface="Amiri" pitchFamily="2" charset="-78"/>
+                <a:ea typeface="Amiri" pitchFamily="2" charset="-78"/>
                 <a:cs typeface="Amiri" pitchFamily="2" charset="-78"/>
               </a:rPr>
               <a:t>و</a:t>
@@ -15593,6 +15725,7 @@
                   <a:srgbClr val="1B3B6F"/>
                 </a:solidFill>
                 <a:latin typeface="Amiri" pitchFamily="2" charset="-78"/>
+                <a:ea typeface="Amiri" pitchFamily="2" charset="-78"/>
                 <a:cs typeface="Amiri" pitchFamily="2" charset="-78"/>
               </a:rPr>
               <a:t>ي</a:t>
@@ -15631,6 +15764,7 @@
                   <a:srgbClr val="0E7C86"/>
                 </a:solidFill>
                 <a:latin typeface="Amiri" pitchFamily="2" charset="-78"/>
+                <a:ea typeface="Amiri" pitchFamily="2" charset="-78"/>
                 <a:cs typeface="Amiri" pitchFamily="2" charset="-78"/>
               </a:rPr>
               <a:t>يَاء</a:t>
@@ -15894,6 +16028,7 @@
                   <a:srgbClr val="D8CFBD"/>
                 </a:solidFill>
                 <a:latin typeface="Amiri" pitchFamily="2" charset="-78"/>
+                <a:ea typeface="Amiri" pitchFamily="2" charset="-78"/>
                 <a:cs typeface="Amiri" pitchFamily="2" charset="-78"/>
               </a:rPr>
               <a:t>ي</a:t>
@@ -15932,6 +16067,7 @@
                   <a:srgbClr val="D8CFBD"/>
                 </a:solidFill>
                 <a:latin typeface="Amiri" pitchFamily="2" charset="-78"/>
+                <a:ea typeface="Amiri" pitchFamily="2" charset="-78"/>
                 <a:cs typeface="Amiri" pitchFamily="2" charset="-78"/>
               </a:rPr>
               <a:t>ي</a:t>
@@ -15970,6 +16106,7 @@
                   <a:srgbClr val="D8CFBD"/>
                 </a:solidFill>
                 <a:latin typeface="Amiri" pitchFamily="2" charset="-78"/>
+                <a:ea typeface="Amiri" pitchFamily="2" charset="-78"/>
                 <a:cs typeface="Amiri" pitchFamily="2" charset="-78"/>
               </a:rPr>
               <a:t>ي</a:t>
@@ -16179,6 +16316,7 @@
                   <a:srgbClr val="D4AF37"/>
                 </a:solidFill>
                 <a:latin typeface="Amiri" pitchFamily="2" charset="-78"/>
+                <a:ea typeface="Amiri" pitchFamily="2" charset="-78"/>
                 <a:cs typeface="Amiri" pitchFamily="2" charset="-78"/>
               </a:rPr>
               <a:t>م</a:t>
@@ -16499,6 +16637,7 @@
                   <a:srgbClr val="8A6D1E"/>
                 </a:solidFill>
                 <a:latin typeface="Amiri" pitchFamily="2" charset="-78"/>
+                <a:ea typeface="Amiri" pitchFamily="2" charset="-78"/>
                 <a:cs typeface="Amiri" pitchFamily="2" charset="-78"/>
               </a:rPr>
               <a:t>مُحَقِّقُ الحُرُوفِ</a:t>
@@ -16710,6 +16849,7 @@
                   <a:srgbClr val="1B3B6F"/>
                 </a:solidFill>
                 <a:latin typeface="Amiri" pitchFamily="2" charset="-78"/>
+                <a:ea typeface="Amiri" pitchFamily="2" charset="-78"/>
                 <a:cs typeface="Amiri" pitchFamily="2" charset="-78"/>
               </a:rPr>
               <a:t>ن</a:t>
@@ -16811,6 +16951,7 @@
                   <a:srgbClr val="1F2A37"/>
                 </a:solidFill>
                 <a:latin typeface="Amiri" pitchFamily="2" charset="-78"/>
+                <a:ea typeface="Amiri" pitchFamily="2" charset="-78"/>
                 <a:cs typeface="Amiri" pitchFamily="2" charset="-78"/>
               </a:rPr>
               <a:t>نُونٌ</a:t>
@@ -16912,6 +17053,7 @@
                   <a:srgbClr val="1F2A37"/>
                 </a:solidFill>
                 <a:latin typeface="Amiri" pitchFamily="2" charset="-78"/>
+                <a:ea typeface="Amiri" pitchFamily="2" charset="-78"/>
                 <a:cs typeface="Amiri" pitchFamily="2" charset="-78"/>
               </a:rPr>
               <a:t>بَاءٌ</a:t>
@@ -17013,6 +17155,7 @@
                   <a:srgbClr val="1F2A37"/>
                 </a:solidFill>
                 <a:latin typeface="Amiri" pitchFamily="2" charset="-78"/>
+                <a:ea typeface="Amiri" pitchFamily="2" charset="-78"/>
                 <a:cs typeface="Amiri" pitchFamily="2" charset="-78"/>
               </a:rPr>
               <a:t>يَاءٌ</a:t>
@@ -17186,6 +17329,7 @@
                   <a:srgbClr val="1B3B6F"/>
                 </a:solidFill>
                 <a:latin typeface="Amiri" pitchFamily="2" charset="-78"/>
+                <a:ea typeface="Amiri" pitchFamily="2" charset="-78"/>
                 <a:cs typeface="Amiri" pitchFamily="2" charset="-78"/>
               </a:rPr>
               <a:t>ي</a:t>
@@ -17287,6 +17431,7 @@
                   <a:srgbClr val="1F2A37"/>
                 </a:solidFill>
                 <a:latin typeface="Amiri" pitchFamily="2" charset="-78"/>
+                <a:ea typeface="Amiri" pitchFamily="2" charset="-78"/>
                 <a:cs typeface="Amiri" pitchFamily="2" charset="-78"/>
               </a:rPr>
               <a:t>تَاءٌ</a:t>
@@ -17388,6 +17533,7 @@
                   <a:srgbClr val="1F2A37"/>
                 </a:solidFill>
                 <a:latin typeface="Amiri" pitchFamily="2" charset="-78"/>
+                <a:ea typeface="Amiri" pitchFamily="2" charset="-78"/>
                 <a:cs typeface="Amiri" pitchFamily="2" charset="-78"/>
               </a:rPr>
               <a:t>نُونٌ</a:t>
@@ -17489,6 +17635,7 @@
                   <a:srgbClr val="1F2A37"/>
                 </a:solidFill>
                 <a:latin typeface="Amiri" pitchFamily="2" charset="-78"/>
+                <a:ea typeface="Amiri" pitchFamily="2" charset="-78"/>
                 <a:cs typeface="Amiri" pitchFamily="2" charset="-78"/>
               </a:rPr>
               <a:t>يَاءٌ</a:t>
@@ -17662,6 +17809,7 @@
                   <a:srgbClr val="1B3B6F"/>
                 </a:solidFill>
                 <a:latin typeface="Amiri" pitchFamily="2" charset="-78"/>
+                <a:ea typeface="Amiri" pitchFamily="2" charset="-78"/>
                 <a:cs typeface="Amiri" pitchFamily="2" charset="-78"/>
               </a:rPr>
               <a:t>و</a:t>
@@ -17763,6 +17911,7 @@
                   <a:srgbClr val="1F2A37"/>
                 </a:solidFill>
                 <a:latin typeface="Amiri" pitchFamily="2" charset="-78"/>
+                <a:ea typeface="Amiri" pitchFamily="2" charset="-78"/>
                 <a:cs typeface="Amiri" pitchFamily="2" charset="-78"/>
               </a:rPr>
               <a:t>مِيمٌ</a:t>
@@ -17864,6 +18013,7 @@
                   <a:srgbClr val="1F2A37"/>
                 </a:solidFill>
                 <a:latin typeface="Amiri" pitchFamily="2" charset="-78"/>
+                <a:ea typeface="Amiri" pitchFamily="2" charset="-78"/>
                 <a:cs typeface="Amiri" pitchFamily="2" charset="-78"/>
               </a:rPr>
               <a:t>رَاءٌ</a:t>
@@ -17965,6 +18115,7 @@
                   <a:srgbClr val="1F2A37"/>
                 </a:solidFill>
                 <a:latin typeface="Amiri" pitchFamily="2" charset="-78"/>
+                <a:ea typeface="Amiri" pitchFamily="2" charset="-78"/>
                 <a:cs typeface="Amiri" pitchFamily="2" charset="-78"/>
               </a:rPr>
               <a:t>وَاوٌ</a:t>
@@ -18138,6 +18289,7 @@
                   <a:srgbClr val="1B3B6F"/>
                 </a:solidFill>
                 <a:latin typeface="Amiri" pitchFamily="2" charset="-78"/>
+                <a:ea typeface="Amiri" pitchFamily="2" charset="-78"/>
                 <a:cs typeface="Amiri" pitchFamily="2" charset="-78"/>
               </a:rPr>
               <a:t>ه</a:t>
@@ -18239,6 +18391,7 @@
                   <a:srgbClr val="1F2A37"/>
                 </a:solidFill>
                 <a:latin typeface="Amiri" pitchFamily="2" charset="-78"/>
+                <a:ea typeface="Amiri" pitchFamily="2" charset="-78"/>
                 <a:cs typeface="Amiri" pitchFamily="2" charset="-78"/>
               </a:rPr>
               <a:t>هَاءٌ</a:t>
@@ -18340,6 +18493,7 @@
                   <a:srgbClr val="1F2A37"/>
                 </a:solidFill>
                 <a:latin typeface="Amiri" pitchFamily="2" charset="-78"/>
+                <a:ea typeface="Amiri" pitchFamily="2" charset="-78"/>
                 <a:cs typeface="Amiri" pitchFamily="2" charset="-78"/>
               </a:rPr>
               <a:t>حَاءٌ</a:t>
@@ -18441,6 +18595,7 @@
                   <a:srgbClr val="1F2A37"/>
                 </a:solidFill>
                 <a:latin typeface="Amiri" pitchFamily="2" charset="-78"/>
+                <a:ea typeface="Amiri" pitchFamily="2" charset="-78"/>
                 <a:cs typeface="Amiri" pitchFamily="2" charset="-78"/>
               </a:rPr>
               <a:t>خَاءٌ</a:t>
@@ -18614,6 +18769,7 @@
                   <a:srgbClr val="1B3B6F"/>
                 </a:solidFill>
                 <a:latin typeface="Amiri" pitchFamily="2" charset="-78"/>
+                <a:ea typeface="Amiri" pitchFamily="2" charset="-78"/>
                 <a:cs typeface="Amiri" pitchFamily="2" charset="-78"/>
               </a:rPr>
               <a:t>ل</a:t>
@@ -18715,6 +18871,7 @@
                   <a:srgbClr val="1F2A37"/>
                 </a:solidFill>
                 <a:latin typeface="Amiri" pitchFamily="2" charset="-78"/>
+                <a:ea typeface="Amiri" pitchFamily="2" charset="-78"/>
                 <a:cs typeface="Amiri" pitchFamily="2" charset="-78"/>
               </a:rPr>
               <a:t>أَلِفٌ</a:t>
@@ -18816,6 +18973,7 @@
                   <a:srgbClr val="1F2A37"/>
                 </a:solidFill>
                 <a:latin typeface="Amiri" pitchFamily="2" charset="-78"/>
+                <a:ea typeface="Amiri" pitchFamily="2" charset="-78"/>
                 <a:cs typeface="Amiri" pitchFamily="2" charset="-78"/>
               </a:rPr>
               <a:t>لَامٌ</a:t>
@@ -18917,6 +19075,7 @@
                   <a:srgbClr val="1F2A37"/>
                 </a:solidFill>
                 <a:latin typeface="Amiri" pitchFamily="2" charset="-78"/>
+                <a:ea typeface="Amiri" pitchFamily="2" charset="-78"/>
                 <a:cs typeface="Amiri" pitchFamily="2" charset="-78"/>
               </a:rPr>
               <a:t>كَافٌ</a:t>
@@ -19219,6 +19378,7 @@
                   <a:srgbClr val="D4AF37"/>
                 </a:solidFill>
                 <a:latin typeface="Amiri" pitchFamily="2" charset="-78"/>
+                <a:ea typeface="Amiri" pitchFamily="2" charset="-78"/>
                 <a:cs typeface="Amiri" pitchFamily="2" charset="-78"/>
               </a:rPr>
               <a:t>م</a:t>
@@ -19539,6 +19699,7 @@
                   <a:srgbClr val="8A6D1E"/>
                 </a:solidFill>
                 <a:latin typeface="Amiri" pitchFamily="2" charset="-78"/>
+                <a:ea typeface="Amiri" pitchFamily="2" charset="-78"/>
                 <a:cs typeface="Amiri" pitchFamily="2" charset="-78"/>
               </a:rPr>
               <a:t>الإِجَابَاتُ</a:t>
@@ -19750,6 +19911,7 @@
                   <a:srgbClr val="1B3B6F"/>
                 </a:solidFill>
                 <a:latin typeface="Amiri" pitchFamily="2" charset="-78"/>
+                <a:ea typeface="Amiri" pitchFamily="2" charset="-78"/>
                 <a:cs typeface="Amiri" pitchFamily="2" charset="-78"/>
               </a:rPr>
               <a:t>ن</a:t>
@@ -19878,6 +20040,7 @@
                   <a:srgbClr val="1F2A37"/>
                 </a:solidFill>
                 <a:latin typeface="Amiri" pitchFamily="2" charset="-78"/>
+                <a:ea typeface="Amiri" pitchFamily="2" charset="-78"/>
                 <a:cs typeface="Amiri" pitchFamily="2" charset="-78"/>
               </a:rPr>
               <a:t>نُونٌ</a:t>
@@ -19979,6 +20142,7 @@
                   <a:srgbClr val="9AA1AB"/>
                 </a:solidFill>
                 <a:latin typeface="Amiri" pitchFamily="2" charset="-78"/>
+                <a:ea typeface="Amiri" pitchFamily="2" charset="-78"/>
                 <a:cs typeface="Amiri" pitchFamily="2" charset="-78"/>
               </a:rPr>
               <a:t>بَاءٌ</a:t>
@@ -20080,6 +20244,7 @@
                   <a:srgbClr val="9AA1AB"/>
                 </a:solidFill>
                 <a:latin typeface="Amiri" pitchFamily="2" charset="-78"/>
+                <a:ea typeface="Amiri" pitchFamily="2" charset="-78"/>
                 <a:cs typeface="Amiri" pitchFamily="2" charset="-78"/>
               </a:rPr>
               <a:t>يَاءٌ</a:t>
@@ -20291,6 +20456,7 @@
                   <a:srgbClr val="1B3B6F"/>
                 </a:solidFill>
                 <a:latin typeface="Amiri" pitchFamily="2" charset="-78"/>
+                <a:ea typeface="Amiri" pitchFamily="2" charset="-78"/>
                 <a:cs typeface="Amiri" pitchFamily="2" charset="-78"/>
               </a:rPr>
               <a:t>ي</a:t>
@@ -20392,6 +20558,7 @@
                   <a:srgbClr val="9AA1AB"/>
                 </a:solidFill>
                 <a:latin typeface="Amiri" pitchFamily="2" charset="-78"/>
+                <a:ea typeface="Amiri" pitchFamily="2" charset="-78"/>
                 <a:cs typeface="Amiri" pitchFamily="2" charset="-78"/>
               </a:rPr>
               <a:t>تَاءٌ</a:t>
@@ -20493,6 +20660,7 @@
                   <a:srgbClr val="9AA1AB"/>
                 </a:solidFill>
                 <a:latin typeface="Amiri" pitchFamily="2" charset="-78"/>
+                <a:ea typeface="Amiri" pitchFamily="2" charset="-78"/>
                 <a:cs typeface="Amiri" pitchFamily="2" charset="-78"/>
               </a:rPr>
               <a:t>نُونٌ</a:t>
@@ -20621,6 +20789,7 @@
                   <a:srgbClr val="1F2A37"/>
                 </a:solidFill>
                 <a:latin typeface="Amiri" pitchFamily="2" charset="-78"/>
+                <a:ea typeface="Amiri" pitchFamily="2" charset="-78"/>
                 <a:cs typeface="Amiri" pitchFamily="2" charset="-78"/>
               </a:rPr>
               <a:t>يَاءٌ</a:t>
@@ -20832,6 +21001,7 @@
                   <a:srgbClr val="1B3B6F"/>
                 </a:solidFill>
                 <a:latin typeface="Amiri" pitchFamily="2" charset="-78"/>
+                <a:ea typeface="Amiri" pitchFamily="2" charset="-78"/>
                 <a:cs typeface="Amiri" pitchFamily="2" charset="-78"/>
               </a:rPr>
               <a:t>و</a:t>
@@ -20933,6 +21103,7 @@
                   <a:srgbClr val="9AA1AB"/>
                 </a:solidFill>
                 <a:latin typeface="Amiri" pitchFamily="2" charset="-78"/>
+                <a:ea typeface="Amiri" pitchFamily="2" charset="-78"/>
                 <a:cs typeface="Amiri" pitchFamily="2" charset="-78"/>
               </a:rPr>
               <a:t>مِيمٌ</a:t>
@@ -21034,6 +21205,7 @@
                   <a:srgbClr val="9AA1AB"/>
                 </a:solidFill>
                 <a:latin typeface="Amiri" pitchFamily="2" charset="-78"/>
+                <a:ea typeface="Amiri" pitchFamily="2" charset="-78"/>
                 <a:cs typeface="Amiri" pitchFamily="2" charset="-78"/>
               </a:rPr>
               <a:t>رَاءٌ</a:t>
@@ -21162,6 +21334,7 @@
                   <a:srgbClr val="1F2A37"/>
                 </a:solidFill>
                 <a:latin typeface="Amiri" pitchFamily="2" charset="-78"/>
+                <a:ea typeface="Amiri" pitchFamily="2" charset="-78"/>
                 <a:cs typeface="Amiri" pitchFamily="2" charset="-78"/>
               </a:rPr>
               <a:t>وَاوٌ</a:t>
@@ -21373,6 +21546,7 @@
                   <a:srgbClr val="1B3B6F"/>
                 </a:solidFill>
                 <a:latin typeface="Amiri" pitchFamily="2" charset="-78"/>
+                <a:ea typeface="Amiri" pitchFamily="2" charset="-78"/>
                 <a:cs typeface="Amiri" pitchFamily="2" charset="-78"/>
               </a:rPr>
               <a:t>ه</a:t>
@@ -21501,6 +21675,7 @@
                   <a:srgbClr val="1F2A37"/>
                 </a:solidFill>
                 <a:latin typeface="Amiri" pitchFamily="2" charset="-78"/>
+                <a:ea typeface="Amiri" pitchFamily="2" charset="-78"/>
                 <a:cs typeface="Amiri" pitchFamily="2" charset="-78"/>
               </a:rPr>
               <a:t>هَاءٌ</a:t>
@@ -21602,6 +21777,7 @@
                   <a:srgbClr val="9AA1AB"/>
                 </a:solidFill>
                 <a:latin typeface="Amiri" pitchFamily="2" charset="-78"/>
+                <a:ea typeface="Amiri" pitchFamily="2" charset="-78"/>
                 <a:cs typeface="Amiri" pitchFamily="2" charset="-78"/>
               </a:rPr>
               <a:t>حَاءٌ</a:t>
@@ -21703,6 +21879,7 @@
                   <a:srgbClr val="9AA1AB"/>
                 </a:solidFill>
                 <a:latin typeface="Amiri" pitchFamily="2" charset="-78"/>
+                <a:ea typeface="Amiri" pitchFamily="2" charset="-78"/>
                 <a:cs typeface="Amiri" pitchFamily="2" charset="-78"/>
               </a:rPr>
               <a:t>خَاءٌ</a:t>
@@ -21914,6 +22091,7 @@
                   <a:srgbClr val="1B3B6F"/>
                 </a:solidFill>
                 <a:latin typeface="Amiri" pitchFamily="2" charset="-78"/>
+                <a:ea typeface="Amiri" pitchFamily="2" charset="-78"/>
                 <a:cs typeface="Amiri" pitchFamily="2" charset="-78"/>
               </a:rPr>
               <a:t>ل</a:t>
@@ -22015,6 +22193,7 @@
                   <a:srgbClr val="9AA1AB"/>
                 </a:solidFill>
                 <a:latin typeface="Amiri" pitchFamily="2" charset="-78"/>
+                <a:ea typeface="Amiri" pitchFamily="2" charset="-78"/>
                 <a:cs typeface="Amiri" pitchFamily="2" charset="-78"/>
               </a:rPr>
               <a:t>أَلِفٌ</a:t>
@@ -22143,6 +22322,7 @@
                   <a:srgbClr val="1F2A37"/>
                 </a:solidFill>
                 <a:latin typeface="Amiri" pitchFamily="2" charset="-78"/>
+                <a:ea typeface="Amiri" pitchFamily="2" charset="-78"/>
                 <a:cs typeface="Amiri" pitchFamily="2" charset="-78"/>
               </a:rPr>
               <a:t>لَامٌ</a:t>
@@ -22244,6 +22424,7 @@
                   <a:srgbClr val="9AA1AB"/>
                 </a:solidFill>
                 <a:latin typeface="Amiri" pitchFamily="2" charset="-78"/>
+                <a:ea typeface="Amiri" pitchFamily="2" charset="-78"/>
                 <a:cs typeface="Amiri" pitchFamily="2" charset="-78"/>
               </a:rPr>
               <a:t>كَافٌ</a:t>
@@ -22584,6 +22765,7 @@
                   <a:srgbClr val="D4AF37"/>
                 </a:solidFill>
                 <a:latin typeface="Amiri" pitchFamily="2" charset="-78"/>
+                <a:ea typeface="Amiri" pitchFamily="2" charset="-78"/>
                 <a:cs typeface="Amiri" pitchFamily="2" charset="-78"/>
               </a:rPr>
               <a:t>م</a:t>
@@ -22904,6 +23086,7 @@
                   <a:srgbClr val="8A6D1E"/>
                 </a:solidFill>
                 <a:latin typeface="Amiri" pitchFamily="2" charset="-78"/>
+                <a:ea typeface="Amiri" pitchFamily="2" charset="-78"/>
                 <a:cs typeface="Amiri" pitchFamily="2" charset="-78"/>
               </a:rPr>
               <a:t>بَوَّابَةُ الاِتِّصَالِ</a:t>
@@ -23014,6 +23197,7 @@
                   <a:srgbClr val="1B3B6F"/>
                 </a:solidFill>
                 <a:latin typeface="Amiri" pitchFamily="2" charset="-78"/>
+                <a:ea typeface="Amiri" pitchFamily="2" charset="-78"/>
                 <a:cs typeface="Amiri" pitchFamily="2" charset="-78"/>
               </a:rPr>
               <a:t>م</a:t>
@@ -23086,6 +23270,7 @@
                   <a:srgbClr val="1B3B6F"/>
                 </a:solidFill>
                 <a:latin typeface="Amiri" pitchFamily="2" charset="-78"/>
+                <a:ea typeface="Amiri" pitchFamily="2" charset="-78"/>
                 <a:cs typeface="Amiri" pitchFamily="2" charset="-78"/>
               </a:rPr>
               <a:t>و</a:t>
@@ -23158,6 +23343,7 @@
                   <a:srgbClr val="1B3B6F"/>
                 </a:solidFill>
                 <a:latin typeface="Amiri" pitchFamily="2" charset="-78"/>
+                <a:ea typeface="Amiri" pitchFamily="2" charset="-78"/>
                 <a:cs typeface="Amiri" pitchFamily="2" charset="-78"/>
               </a:rPr>
               <a:t>ي</a:t>
@@ -23230,6 +23416,7 @@
                   <a:srgbClr val="1B3B6F"/>
                 </a:solidFill>
                 <a:latin typeface="Amiri" pitchFamily="2" charset="-78"/>
+                <a:ea typeface="Amiri" pitchFamily="2" charset="-78"/>
                 <a:cs typeface="Amiri" pitchFamily="2" charset="-78"/>
               </a:rPr>
               <a:t>ا</a:t>
@@ -23302,6 +23489,7 @@
                   <a:srgbClr val="1B3B6F"/>
                 </a:solidFill>
                 <a:latin typeface="Amiri" pitchFamily="2" charset="-78"/>
+                <a:ea typeface="Amiri" pitchFamily="2" charset="-78"/>
                 <a:cs typeface="Amiri" pitchFamily="2" charset="-78"/>
               </a:rPr>
               <a:t>ل</a:t>
@@ -23374,6 +23562,7 @@
                   <a:srgbClr val="1B3B6F"/>
                 </a:solidFill>
                 <a:latin typeface="Amiri" pitchFamily="2" charset="-78"/>
+                <a:ea typeface="Amiri" pitchFamily="2" charset="-78"/>
                 <a:cs typeface="Amiri" pitchFamily="2" charset="-78"/>
               </a:rPr>
               <a:t>ر</a:t>
@@ -23446,6 +23635,7 @@
                   <a:srgbClr val="1B3B6F"/>
                 </a:solidFill>
                 <a:latin typeface="Amiri" pitchFamily="2" charset="-78"/>
+                <a:ea typeface="Amiri" pitchFamily="2" charset="-78"/>
                 <a:cs typeface="Amiri" pitchFamily="2" charset="-78"/>
               </a:rPr>
               <a:t>ن</a:t>
@@ -23518,6 +23708,7 @@
                   <a:srgbClr val="1B3B6F"/>
                 </a:solidFill>
                 <a:latin typeface="Amiri" pitchFamily="2" charset="-78"/>
+                <a:ea typeface="Amiri" pitchFamily="2" charset="-78"/>
                 <a:cs typeface="Amiri" pitchFamily="2" charset="-78"/>
               </a:rPr>
               <a:t>د</a:t>
@@ -23835,6 +24026,7 @@
                   <a:srgbClr val="D4AF37"/>
                 </a:solidFill>
                 <a:latin typeface="Amiri" pitchFamily="2" charset="-78"/>
+                <a:ea typeface="Amiri" pitchFamily="2" charset="-78"/>
                 <a:cs typeface="Amiri" pitchFamily="2" charset="-78"/>
               </a:rPr>
               <a:t>م</a:t>
@@ -24155,6 +24347,7 @@
                   <a:srgbClr val="8A6D1E"/>
                 </a:solidFill>
                 <a:latin typeface="Amiri" pitchFamily="2" charset="-78"/>
+                <a:ea typeface="Amiri" pitchFamily="2" charset="-78"/>
                 <a:cs typeface="Amiri" pitchFamily="2" charset="-78"/>
               </a:rPr>
               <a:t>الإِجَابَاتُ</a:t>
@@ -24350,6 +24543,7 @@
                   <a:srgbClr val="1B3B6F"/>
                 </a:solidFill>
                 <a:latin typeface="Amiri" pitchFamily="2" charset="-78"/>
+                <a:ea typeface="Amiri" pitchFamily="2" charset="-78"/>
                 <a:cs typeface="Amiri" pitchFamily="2" charset="-78"/>
               </a:rPr>
               <a:t>و</a:t>
@@ -24415,6 +24609,7 @@
                   <a:srgbClr val="1B3B6F"/>
                 </a:solidFill>
                 <a:latin typeface="Amiri" pitchFamily="2" charset="-78"/>
+                <a:ea typeface="Amiri" pitchFamily="2" charset="-78"/>
                 <a:cs typeface="Amiri" pitchFamily="2" charset="-78"/>
               </a:rPr>
               <a:t>ا</a:t>
@@ -24480,6 +24675,7 @@
                   <a:srgbClr val="1B3B6F"/>
                 </a:solidFill>
                 <a:latin typeface="Amiri" pitchFamily="2" charset="-78"/>
+                <a:ea typeface="Amiri" pitchFamily="2" charset="-78"/>
                 <a:cs typeface="Amiri" pitchFamily="2" charset="-78"/>
               </a:rPr>
               <a:t>ر</a:t>
@@ -24545,6 +24741,7 @@
                   <a:srgbClr val="1B3B6F"/>
                 </a:solidFill>
                 <a:latin typeface="Amiri" pitchFamily="2" charset="-78"/>
+                <a:ea typeface="Amiri" pitchFamily="2" charset="-78"/>
                 <a:cs typeface="Amiri" pitchFamily="2" charset="-78"/>
               </a:rPr>
               <a:t>د</a:t>
@@ -24702,6 +24899,7 @@
                   <a:srgbClr val="1B3B6F"/>
                 </a:solidFill>
                 <a:latin typeface="Amiri" pitchFamily="2" charset="-78"/>
+                <a:ea typeface="Amiri" pitchFamily="2" charset="-78"/>
                 <a:cs typeface="Amiri" pitchFamily="2" charset="-78"/>
               </a:rPr>
               <a:t>م</a:t>
@@ -24767,6 +24965,7 @@
                   <a:srgbClr val="1B3B6F"/>
                 </a:solidFill>
                 <a:latin typeface="Amiri" pitchFamily="2" charset="-78"/>
+                <a:ea typeface="Amiri" pitchFamily="2" charset="-78"/>
                 <a:cs typeface="Amiri" pitchFamily="2" charset="-78"/>
               </a:rPr>
               <a:t>ي</a:t>
@@ -24832,6 +25031,7 @@
                   <a:srgbClr val="1B3B6F"/>
                 </a:solidFill>
                 <a:latin typeface="Amiri" pitchFamily="2" charset="-78"/>
+                <a:ea typeface="Amiri" pitchFamily="2" charset="-78"/>
                 <a:cs typeface="Amiri" pitchFamily="2" charset="-78"/>
               </a:rPr>
               <a:t>ل</a:t>
@@ -24897,6 +25097,7 @@
                   <a:srgbClr val="1B3B6F"/>
                 </a:solidFill>
                 <a:latin typeface="Amiri" pitchFamily="2" charset="-78"/>
+                <a:ea typeface="Amiri" pitchFamily="2" charset="-78"/>
                 <a:cs typeface="Amiri" pitchFamily="2" charset="-78"/>
               </a:rPr>
               <a:t>ن</a:t>
@@ -25030,6 +25231,7 @@
                   <a:srgbClr val="D4AF37"/>
                 </a:solidFill>
                 <a:latin typeface="Amiri" pitchFamily="2" charset="-78"/>
+                <a:ea typeface="Amiri" pitchFamily="2" charset="-78"/>
                 <a:cs typeface="Amiri" pitchFamily="2" charset="-78"/>
               </a:rPr>
               <a:t>م</a:t>
@@ -25350,6 +25552,7 @@
                   <a:srgbClr val="8A6D1E"/>
                 </a:solidFill>
                 <a:latin typeface="Amiri" pitchFamily="2" charset="-78"/>
+                <a:ea typeface="Amiri" pitchFamily="2" charset="-78"/>
                 <a:cs typeface="Amiri" pitchFamily="2" charset="-78"/>
               </a:rPr>
               <a:t>اِقْرَأِ الحَرَكَاتِ</a:t>
@@ -25561,6 +25764,7 @@
                   <a:srgbClr val="1B3B6F"/>
                 </a:solidFill>
                 <a:latin typeface="Amiri" pitchFamily="2" charset="-78"/>
+                <a:ea typeface="Amiri" pitchFamily="2" charset="-78"/>
                 <a:cs typeface="Amiri" pitchFamily="2" charset="-78"/>
               </a:rPr>
               <a:t>بَ</a:t>
@@ -26037,6 +26241,7 @@
                   <a:srgbClr val="1B3B6F"/>
                 </a:solidFill>
                 <a:latin typeface="Amiri" pitchFamily="2" charset="-78"/>
+                <a:ea typeface="Amiri" pitchFamily="2" charset="-78"/>
                 <a:cs typeface="Amiri" pitchFamily="2" charset="-78"/>
               </a:rPr>
               <a:t>بِ</a:t>
@@ -26513,6 +26718,7 @@
                   <a:srgbClr val="1B3B6F"/>
                 </a:solidFill>
                 <a:latin typeface="Amiri" pitchFamily="2" charset="-78"/>
+                <a:ea typeface="Amiri" pitchFamily="2" charset="-78"/>
                 <a:cs typeface="Amiri" pitchFamily="2" charset="-78"/>
               </a:rPr>
               <a:t>بُ</a:t>
@@ -26989,6 +27195,7 @@
                   <a:srgbClr val="1B3B6F"/>
                 </a:solidFill>
                 <a:latin typeface="Amiri" pitchFamily="2" charset="-78"/>
+                <a:ea typeface="Amiri" pitchFamily="2" charset="-78"/>
                 <a:cs typeface="Amiri" pitchFamily="2" charset="-78"/>
               </a:rPr>
               <a:t>مِنْ</a:t>
@@ -27947,6 +28154,7 @@
                   <a:srgbClr val="D4AF37"/>
                 </a:solidFill>
                 <a:latin typeface="Amiri" pitchFamily="2" charset="-78"/>
+                <a:ea typeface="Amiri" pitchFamily="2" charset="-78"/>
                 <a:cs typeface="Amiri" pitchFamily="2" charset="-78"/>
               </a:rPr>
               <a:t>م</a:t>
@@ -28267,6 +28475,7 @@
                   <a:srgbClr val="8A6D1E"/>
                 </a:solidFill>
                 <a:latin typeface="Amiri" pitchFamily="2" charset="-78"/>
+                <a:ea typeface="Amiri" pitchFamily="2" charset="-78"/>
                 <a:cs typeface="Amiri" pitchFamily="2" charset="-78"/>
               </a:rPr>
               <a:t>آدَابُ الصَّفِّ</a:t>
@@ -29798,6 +30007,7 @@
                   <a:srgbClr val="D4AF37"/>
                 </a:solidFill>
                 <a:latin typeface="Amiri" pitchFamily="2" charset="-78"/>
+                <a:ea typeface="Amiri" pitchFamily="2" charset="-78"/>
                 <a:cs typeface="Amiri" pitchFamily="2" charset="-78"/>
               </a:rPr>
               <a:t>م</a:t>
@@ -30118,6 +30328,7 @@
                   <a:srgbClr val="8A6D1E"/>
                 </a:solidFill>
                 <a:latin typeface="Amiri" pitchFamily="2" charset="-78"/>
+                <a:ea typeface="Amiri" pitchFamily="2" charset="-78"/>
                 <a:cs typeface="Amiri" pitchFamily="2" charset="-78"/>
               </a:rPr>
               <a:t>الإِجَابَاتُ</a:t>
@@ -30329,6 +30540,7 @@
                   <a:srgbClr val="1B3B6F"/>
                 </a:solidFill>
                 <a:latin typeface="Amiri" pitchFamily="2" charset="-78"/>
+                <a:ea typeface="Amiri" pitchFamily="2" charset="-78"/>
                 <a:cs typeface="Amiri" pitchFamily="2" charset="-78"/>
               </a:rPr>
               <a:t>بَ</a:t>
@@ -30870,6 +31082,7 @@
                   <a:srgbClr val="1B3B6F"/>
                 </a:solidFill>
                 <a:latin typeface="Amiri" pitchFamily="2" charset="-78"/>
+                <a:ea typeface="Amiri" pitchFamily="2" charset="-78"/>
                 <a:cs typeface="Amiri" pitchFamily="2" charset="-78"/>
               </a:rPr>
               <a:t>بِ</a:t>
@@ -31411,6 +31624,7 @@
                   <a:srgbClr val="1B3B6F"/>
                 </a:solidFill>
                 <a:latin typeface="Amiri" pitchFamily="2" charset="-78"/>
+                <a:ea typeface="Amiri" pitchFamily="2" charset="-78"/>
                 <a:cs typeface="Amiri" pitchFamily="2" charset="-78"/>
               </a:rPr>
               <a:t>بُ</a:t>
@@ -31952,6 +32166,7 @@
                   <a:srgbClr val="1B3B6F"/>
                 </a:solidFill>
                 <a:latin typeface="Amiri" pitchFamily="2" charset="-78"/>
+                <a:ea typeface="Amiri" pitchFamily="2" charset="-78"/>
                 <a:cs typeface="Amiri" pitchFamily="2" charset="-78"/>
               </a:rPr>
               <a:t>مِنْ</a:t>
@@ -33040,6 +33255,7 @@
                   <a:srgbClr val="D4AF37"/>
                 </a:solidFill>
                 <a:latin typeface="Amiri" pitchFamily="2" charset="-78"/>
+                <a:ea typeface="Amiri" pitchFamily="2" charset="-78"/>
                 <a:cs typeface="Amiri" pitchFamily="2" charset="-78"/>
               </a:rPr>
               <a:t>م</a:t>
@@ -33360,6 +33576,7 @@
                   <a:srgbClr val="8A6D1E"/>
                 </a:solidFill>
                 <a:latin typeface="Amiri" pitchFamily="2" charset="-78"/>
+                <a:ea typeface="Amiri" pitchFamily="2" charset="-78"/>
                 <a:cs typeface="Amiri" pitchFamily="2" charset="-78"/>
               </a:rPr>
               <a:t>كَلِمَاتِي الأُولَى</a:t>
@@ -33463,6 +33680,7 @@
                   <a:srgbClr val="1B3B6F"/>
                 </a:solidFill>
                 <a:latin typeface="Amiri" pitchFamily="2" charset="-78"/>
+                <a:ea typeface="Amiri" pitchFamily="2" charset="-78"/>
                 <a:cs typeface="Amiri" pitchFamily="2" charset="-78"/>
               </a:rPr>
               <a:t>كَتَبَ</a:t>
@@ -33566,6 +33784,7 @@
                   <a:srgbClr val="1B3B6F"/>
                 </a:solidFill>
                 <a:latin typeface="Amiri" pitchFamily="2" charset="-78"/>
+                <a:ea typeface="Amiri" pitchFamily="2" charset="-78"/>
                 <a:cs typeface="Amiri" pitchFamily="2" charset="-78"/>
               </a:rPr>
               <a:t>فَهِمَ</a:t>
@@ -33669,6 +33888,7 @@
                   <a:srgbClr val="1B3B6F"/>
                 </a:solidFill>
                 <a:latin typeface="Amiri" pitchFamily="2" charset="-78"/>
+                <a:ea typeface="Amiri" pitchFamily="2" charset="-78"/>
                 <a:cs typeface="Amiri" pitchFamily="2" charset="-78"/>
               </a:rPr>
               <a:t>هُوَ</a:t>
@@ -33772,6 +33992,7 @@
                   <a:srgbClr val="1B3B6F"/>
                 </a:solidFill>
                 <a:latin typeface="Amiri" pitchFamily="2" charset="-78"/>
+                <a:ea typeface="Amiri" pitchFamily="2" charset="-78"/>
                 <a:cs typeface="Amiri" pitchFamily="2" charset="-78"/>
               </a:rPr>
               <a:t>مِنْ</a:t>
@@ -33875,6 +34096,7 @@
                   <a:srgbClr val="1B3B6F"/>
                 </a:solidFill>
                 <a:latin typeface="Amiri" pitchFamily="2" charset="-78"/>
+                <a:ea typeface="Amiri" pitchFamily="2" charset="-78"/>
                 <a:cs typeface="Amiri" pitchFamily="2" charset="-78"/>
               </a:rPr>
               <a:t>لَا</a:t>
@@ -33978,6 +34200,7 @@
                   <a:srgbClr val="1B3B6F"/>
                 </a:solidFill>
                 <a:latin typeface="Amiri" pitchFamily="2" charset="-78"/>
+                <a:ea typeface="Amiri" pitchFamily="2" charset="-78"/>
                 <a:cs typeface="Amiri" pitchFamily="2" charset="-78"/>
               </a:rPr>
               <a:t>سَلَامٌ</a:t>
@@ -34149,6 +34372,7 @@
                   <a:srgbClr val="D4AF37"/>
                 </a:solidFill>
                 <a:latin typeface="Amiri" pitchFamily="2" charset="-78"/>
+                <a:ea typeface="Amiri" pitchFamily="2" charset="-78"/>
                 <a:cs typeface="Amiri" pitchFamily="2" charset="-78"/>
               </a:rPr>
               <a:t>م</a:t>
@@ -34469,6 +34693,7 @@
                   <a:srgbClr val="8A6D1E"/>
                 </a:solidFill>
                 <a:latin typeface="Amiri" pitchFamily="2" charset="-78"/>
+                <a:ea typeface="Amiri" pitchFamily="2" charset="-78"/>
                 <a:cs typeface="Amiri" pitchFamily="2" charset="-78"/>
               </a:rPr>
               <a:t>اُكْتُبْ</a:t>
@@ -34644,6 +34869,7 @@
                   <a:srgbClr val="2E8B57"/>
                 </a:solidFill>
                 <a:latin typeface="Amiri" pitchFamily="2" charset="-78"/>
+                <a:ea typeface="Amiri" pitchFamily="2" charset="-78"/>
                 <a:cs typeface="Amiri" pitchFamily="2" charset="-78"/>
               </a:rPr>
               <a:t>الأَسَاسُ</a:t>
@@ -34733,6 +34959,7 @@
                   <a:srgbClr val="1F2A37"/>
                 </a:solidFill>
                 <a:latin typeface="Amiri" pitchFamily="2" charset="-78"/>
+                <a:ea typeface="Amiri" pitchFamily="2" charset="-78"/>
                 <a:cs typeface="Amiri" pitchFamily="2" charset="-78"/>
               </a:rPr>
               <a:t>بَ بُ بِ بْ</a:t>
@@ -34964,6 +35191,7 @@
                   <a:srgbClr val="C9780A"/>
                 </a:solidFill>
                 <a:latin typeface="Amiri" pitchFamily="2" charset="-78"/>
+                <a:ea typeface="Amiri" pitchFamily="2" charset="-78"/>
                 <a:cs typeface="Amiri" pitchFamily="2" charset="-78"/>
               </a:rPr>
               <a:t>التَّطْوِيرُ</a:t>
@@ -35258,6 +35486,7 @@
                   <a:srgbClr val="B83227"/>
                 </a:solidFill>
                 <a:latin typeface="Amiri" pitchFamily="2" charset="-78"/>
+                <a:ea typeface="Amiri" pitchFamily="2" charset="-78"/>
                 <a:cs typeface="Amiri" pitchFamily="2" charset="-78"/>
               </a:rPr>
               <a:t>التَّحَدِّي</a:t>
@@ -35347,6 +35576,7 @@
                   <a:srgbClr val="1F2A37"/>
                 </a:solidFill>
                 <a:latin typeface="Amiri" pitchFamily="2" charset="-78"/>
+                <a:ea typeface="Amiri" pitchFamily="2" charset="-78"/>
                 <a:cs typeface="Amiri" pitchFamily="2" charset="-78"/>
               </a:rPr>
               <a:t>كَتَبَ فَهِمَ هُوَ مِنْ</a:t>
@@ -35574,6 +35804,7 @@
                   <a:srgbClr val="D4AF37"/>
                 </a:solidFill>
                 <a:latin typeface="Amiri" pitchFamily="2" charset="-78"/>
+                <a:ea typeface="Amiri" pitchFamily="2" charset="-78"/>
                 <a:cs typeface="Amiri" pitchFamily="2" charset="-78"/>
               </a:rPr>
               <a:t>م</a:t>
@@ -35894,6 +36125,7 @@
                   <a:srgbClr val="8A6D1E"/>
                 </a:solidFill>
                 <a:latin typeface="Amiri" pitchFamily="2" charset="-78"/>
+                <a:ea typeface="Amiri" pitchFamily="2" charset="-78"/>
                 <a:cs typeface="Amiri" pitchFamily="2" charset="-78"/>
               </a:rPr>
               <a:t>التَّحَدُّثُ</a:t>
@@ -36664,6 +36896,7 @@
                   <a:srgbClr val="1B3B6F"/>
                 </a:solidFill>
                 <a:latin typeface="Amiri" pitchFamily="2" charset="-78"/>
+                <a:ea typeface="Amiri" pitchFamily="2" charset="-78"/>
                 <a:cs typeface="Amiri" pitchFamily="2" charset="-78"/>
               </a:rPr>
               <a:t>اِقْرَأْ: بَ · بُ · بِ · بْ</a:t>
@@ -36801,6 +37034,7 @@
                   <a:srgbClr val="1B3B6F"/>
                 </a:solidFill>
                 <a:latin typeface="Amiri" pitchFamily="2" charset="-78"/>
+                <a:ea typeface="Amiri" pitchFamily="2" charset="-78"/>
                 <a:cs typeface="Amiri" pitchFamily="2" charset="-78"/>
               </a:rPr>
               <a:t>مَا هٰذَا الحَرْفُ؟</a:t>
@@ -36938,6 +37172,7 @@
                   <a:srgbClr val="1B3B6F"/>
                 </a:solidFill>
                 <a:latin typeface="Amiri" pitchFamily="2" charset="-78"/>
+                <a:ea typeface="Amiri" pitchFamily="2" charset="-78"/>
                 <a:cs typeface="Amiri" pitchFamily="2" charset="-78"/>
               </a:rPr>
               <a:t>اِقْرَأْ: كَتَبَ · هُوَ · مِنْ</a:t>
@@ -37075,6 +37310,7 @@
                   <a:srgbClr val="1B3B6F"/>
                 </a:solidFill>
                 <a:latin typeface="Amiri" pitchFamily="2" charset="-78"/>
+                <a:ea typeface="Amiri" pitchFamily="2" charset="-78"/>
                 <a:cs typeface="Amiri" pitchFamily="2" charset="-78"/>
               </a:rPr>
               <a:t>اِقْرَأِ الحُرُوفَ كُلَّهَا.</a:t>
@@ -37250,6 +37486,7 @@
                   <a:srgbClr val="1D5FBF"/>
                 </a:solidFill>
                 <a:latin typeface="Amiri" pitchFamily="2" charset="-78"/>
+                <a:ea typeface="Amiri" pitchFamily="2" charset="-78"/>
                 <a:cs typeface="Amiri" pitchFamily="2" charset="-78"/>
               </a:rPr>
               <a:t>هٰذَا ___ .</a:t>
@@ -37353,6 +37590,7 @@
                   <a:srgbClr val="1F2A37"/>
                 </a:solidFill>
                 <a:latin typeface="Amiri" pitchFamily="2" charset="-78"/>
+                <a:ea typeface="Amiri" pitchFamily="2" charset="-78"/>
                 <a:cs typeface="Amiri" pitchFamily="2" charset="-78"/>
               </a:rPr>
               <a:t>هٰذِهِ فَتْحَةٌ / ضَمَّةٌ / كَسْرَةٌ / سُكُونٌ .</a:t>
@@ -37456,6 +37694,7 @@
                   <a:srgbClr val="1F2A37"/>
                 </a:solidFill>
                 <a:latin typeface="Amiri" pitchFamily="2" charset="-78"/>
+                <a:ea typeface="Amiri" pitchFamily="2" charset="-78"/>
                 <a:cs typeface="Amiri" pitchFamily="2" charset="-78"/>
               </a:rPr>
               <a:t>ا ب ت ث … ن ه و ي</a:t>
@@ -37559,6 +37798,7 @@
                   <a:srgbClr val="1F2A37"/>
                 </a:solidFill>
                 <a:latin typeface="Amiri" pitchFamily="2" charset="-78"/>
+                <a:ea typeface="Amiri" pitchFamily="2" charset="-78"/>
                 <a:cs typeface="Amiri" pitchFamily="2" charset="-78"/>
               </a:rPr>
               <a:t>قَرَأَ / قَرَأَتْ ___ .</a:t>
@@ -37732,6 +37972,7 @@
                   <a:srgbClr val="1F2A37"/>
                 </a:solidFill>
                 <a:latin typeface="Amiri" pitchFamily="2" charset="-78"/>
+                <a:ea typeface="Amiri" pitchFamily="2" charset="-78"/>
                 <a:cs typeface="Amiri" pitchFamily="2" charset="-78"/>
               </a:rPr>
               <a:t>اِقْرَأْ: نَ · نُ · نِ · نْ</a:t>
@@ -37871,6 +38112,7 @@
                   <a:srgbClr val="1F2A37"/>
                 </a:solidFill>
                 <a:latin typeface="Amiri" pitchFamily="2" charset="-78"/>
+                <a:ea typeface="Amiri" pitchFamily="2" charset="-78"/>
                 <a:cs typeface="Amiri" pitchFamily="2" charset="-78"/>
               </a:rPr>
               <a:t>نَ، نُ، نِ، نْ.</a:t>
@@ -38042,6 +38284,7 @@
                   <a:srgbClr val="D4AF37"/>
                 </a:solidFill>
                 <a:latin typeface="Amiri" pitchFamily="2" charset="-78"/>
+                <a:ea typeface="Amiri" pitchFamily="2" charset="-78"/>
                 <a:cs typeface="Amiri" pitchFamily="2" charset="-78"/>
               </a:rPr>
               <a:t>م</a:t>
@@ -38362,6 +38605,7 @@
                   <a:srgbClr val="8A6D1E"/>
                 </a:solidFill>
                 <a:latin typeface="Amiri" pitchFamily="2" charset="-78"/>
+                <a:ea typeface="Amiri" pitchFamily="2" charset="-78"/>
                 <a:cs typeface="Amiri" pitchFamily="2" charset="-78"/>
               </a:rPr>
               <a:t>أَخْطَاءٌ شَائِعَةٌ</a:t>
@@ -38747,6 +38991,7 @@
                   <a:srgbClr val="5A6472"/>
                 </a:solidFill>
                 <a:latin typeface="Amiri" pitchFamily="2" charset="-78"/>
+                <a:ea typeface="Amiri" pitchFamily="2" charset="-78"/>
                 <a:cs typeface="Amiri" pitchFamily="2" charset="-78"/>
               </a:rPr>
               <a:t>و</a:t>
@@ -38811,6 +39056,7 @@
                   <a:srgbClr val="5A6472"/>
                 </a:solidFill>
                 <a:latin typeface="Amiri" pitchFamily="2" charset="-78"/>
+                <a:ea typeface="Amiri" pitchFamily="2" charset="-78"/>
                 <a:cs typeface="Amiri" pitchFamily="2" charset="-78"/>
               </a:rPr>
               <a:t>ا د ذ ر ز</a:t>
@@ -38967,6 +39213,7 @@
                   <a:srgbClr val="5A6472"/>
                 </a:solidFill>
                 <a:latin typeface="Amiri" pitchFamily="2" charset="-78"/>
+                <a:ea typeface="Amiri" pitchFamily="2" charset="-78"/>
                 <a:cs typeface="Amiri" pitchFamily="2" charset="-78"/>
               </a:rPr>
               <a:t>ه</a:t>
@@ -38993,6 +39240,7 @@
                   <a:srgbClr val="5A6472"/>
                 </a:solidFill>
                 <a:latin typeface="Amiri" pitchFamily="2" charset="-78"/>
+                <a:ea typeface="Amiri" pitchFamily="2" charset="-78"/>
                 <a:cs typeface="Amiri" pitchFamily="2" charset="-78"/>
               </a:rPr>
               <a:t>ح</a:t>
@@ -39031,6 +39279,7 @@
                   <a:srgbClr val="5A6472"/>
                 </a:solidFill>
                 <a:latin typeface="Amiri" pitchFamily="2" charset="-78"/>
+                <a:ea typeface="Amiri" pitchFamily="2" charset="-78"/>
                 <a:cs typeface="Amiri" pitchFamily="2" charset="-78"/>
               </a:rPr>
               <a:t>ه</a:t>
@@ -39057,6 +39306,7 @@
                   <a:srgbClr val="5A6472"/>
                 </a:solidFill>
                 <a:latin typeface="Amiri" pitchFamily="2" charset="-78"/>
+                <a:ea typeface="Amiri" pitchFamily="2" charset="-78"/>
                 <a:cs typeface="Amiri" pitchFamily="2" charset="-78"/>
               </a:rPr>
               <a:t>ح</a:t>
@@ -39251,6 +39501,7 @@
                   <a:srgbClr val="5A6472"/>
                 </a:solidFill>
                 <a:latin typeface="Amiri" pitchFamily="2" charset="-78"/>
+                <a:ea typeface="Amiri" pitchFamily="2" charset="-78"/>
                 <a:cs typeface="Amiri" pitchFamily="2" charset="-78"/>
               </a:rPr>
               <a:t>هَلْ</a:t>
@@ -39342,6 +39593,7 @@
                   <a:srgbClr val="5A6472"/>
                 </a:solidFill>
                 <a:latin typeface="Amiri" pitchFamily="2" charset="-78"/>
+                <a:ea typeface="Amiri" pitchFamily="2" charset="-78"/>
                 <a:cs typeface="Amiri" pitchFamily="2" charset="-78"/>
               </a:rPr>
               <a:t>لا</a:t>
@@ -39471,6 +39723,7 @@
                   <a:srgbClr val="5A6472"/>
                 </a:solidFill>
                 <a:latin typeface="Amiri" pitchFamily="2" charset="-78"/>
+                <a:ea typeface="Amiri" pitchFamily="2" charset="-78"/>
                 <a:cs typeface="Amiri" pitchFamily="2" charset="-78"/>
               </a:rPr>
               <a:t>الله</a:t>
@@ -39497,6 +39750,7 @@
                   <a:srgbClr val="5A6472"/>
                 </a:solidFill>
                 <a:latin typeface="Amiri" pitchFamily="2" charset="-78"/>
+                <a:ea typeface="Amiri" pitchFamily="2" charset="-78"/>
                 <a:cs typeface="Amiri" pitchFamily="2" charset="-78"/>
               </a:rPr>
               <a:t>لا</a:t>
@@ -39668,6 +39922,7 @@
                   <a:srgbClr val="D4AF37"/>
                 </a:solidFill>
                 <a:latin typeface="Amiri" pitchFamily="2" charset="-78"/>
+                <a:ea typeface="Amiri" pitchFamily="2" charset="-78"/>
                 <a:cs typeface="Amiri" pitchFamily="2" charset="-78"/>
               </a:rPr>
               <a:t>م</a:t>
@@ -39988,6 +40243,7 @@
                   <a:srgbClr val="8A6D1E"/>
                 </a:solidFill>
                 <a:latin typeface="Amiri" pitchFamily="2" charset="-78"/>
+                <a:ea typeface="Amiri" pitchFamily="2" charset="-78"/>
                 <a:cs typeface="Amiri" pitchFamily="2" charset="-78"/>
               </a:rPr>
               <a:t>قَيِّمْ عَمَلَكَ</a:t>
@@ -40298,6 +40554,7 @@
                   <a:srgbClr val="1F2A37"/>
                 </a:solidFill>
                 <a:latin typeface="Amiri" pitchFamily="2" charset="-78"/>
+                <a:ea typeface="Amiri" pitchFamily="2" charset="-78"/>
                 <a:cs typeface="Amiri" pitchFamily="2" charset="-78"/>
               </a:rPr>
               <a:t>بَ بُ بِ بْ</a:t>
@@ -40486,6 +40743,7 @@
                   <a:srgbClr val="1F2A37"/>
                 </a:solidFill>
                 <a:latin typeface="Amiri" pitchFamily="2" charset="-78"/>
+                <a:ea typeface="Amiri" pitchFamily="2" charset="-78"/>
                 <a:cs typeface="Amiri" pitchFamily="2" charset="-78"/>
               </a:rPr>
               <a:t>كَتَبَ</a:t>
@@ -40512,6 +40770,7 @@
                   <a:srgbClr val="1F2A37"/>
                 </a:solidFill>
                 <a:latin typeface="Amiri" pitchFamily="2" charset="-78"/>
+                <a:ea typeface="Amiri" pitchFamily="2" charset="-78"/>
                 <a:cs typeface="Amiri" pitchFamily="2" charset="-78"/>
               </a:rPr>
               <a:t>فَهِمَ</a:t>
@@ -40538,6 +40797,7 @@
                   <a:srgbClr val="1F2A37"/>
                 </a:solidFill>
                 <a:latin typeface="Amiri" pitchFamily="2" charset="-78"/>
+                <a:ea typeface="Amiri" pitchFamily="2" charset="-78"/>
                 <a:cs typeface="Amiri" pitchFamily="2" charset="-78"/>
               </a:rPr>
               <a:t>هُوَ</a:t>
@@ -40564,6 +40824,7 @@
                   <a:srgbClr val="1F2A37"/>
                 </a:solidFill>
                 <a:latin typeface="Amiri" pitchFamily="2" charset="-78"/>
+                <a:ea typeface="Amiri" pitchFamily="2" charset="-78"/>
                 <a:cs typeface="Amiri" pitchFamily="2" charset="-78"/>
               </a:rPr>
               <a:t>مِنْ</a:t>
@@ -40752,6 +41013,7 @@
                   <a:srgbClr val="1F2A37"/>
                 </a:solidFill>
                 <a:latin typeface="Amiri" pitchFamily="2" charset="-78"/>
+                <a:ea typeface="Amiri" pitchFamily="2" charset="-78"/>
                 <a:cs typeface="Amiri" pitchFamily="2" charset="-78"/>
               </a:rPr>
               <a:t>و</a:t>
@@ -40778,6 +41040,7 @@
                   <a:srgbClr val="1F2A37"/>
                 </a:solidFill>
                 <a:latin typeface="Amiri" pitchFamily="2" charset="-78"/>
+                <a:ea typeface="Amiri" pitchFamily="2" charset="-78"/>
                 <a:cs typeface="Amiri" pitchFamily="2" charset="-78"/>
               </a:rPr>
               <a:t>ي</a:t>
@@ -41327,6 +41590,7 @@
                   <a:srgbClr val="D4AF37"/>
                 </a:solidFill>
                 <a:latin typeface="Amiri" pitchFamily="2" charset="-78"/>
+                <a:ea typeface="Amiri" pitchFamily="2" charset="-78"/>
                 <a:cs typeface="Amiri" pitchFamily="2" charset="-78"/>
               </a:rPr>
               <a:t>م</a:t>
@@ -41647,6 +41911,7 @@
                   <a:srgbClr val="8A6D1E"/>
                 </a:solidFill>
                 <a:latin typeface="Amiri" pitchFamily="2" charset="-78"/>
+                <a:ea typeface="Amiri" pitchFamily="2" charset="-78"/>
                 <a:cs typeface="Amiri" pitchFamily="2" charset="-78"/>
               </a:rPr>
               <a:t>تَذْكِرَةُ الخُرُوجِ</a:t>
@@ -41833,6 +42098,7 @@
                   <a:srgbClr val="1B3B6F"/>
                 </a:solidFill>
                 <a:latin typeface="Amiri" pitchFamily="2" charset="-78"/>
+                <a:ea typeface="Amiri" pitchFamily="2" charset="-78"/>
                 <a:cs typeface="Amiri" pitchFamily="2" charset="-78"/>
               </a:rPr>
               <a:t>لا</a:t>
@@ -42284,6 +42550,7 @@
                   <a:srgbClr val="1F2A37"/>
                 </a:solidFill>
                 <a:latin typeface="Amiri" pitchFamily="2" charset="-78"/>
+                <a:ea typeface="Amiri" pitchFamily="2" charset="-78"/>
                 <a:cs typeface="Amiri" pitchFamily="2" charset="-78"/>
               </a:rPr>
               <a:t>ع</a:t>
@@ -42385,6 +42652,7 @@
                   <a:srgbClr val="1F2A37"/>
                 </a:solidFill>
                 <a:latin typeface="Amiri" pitchFamily="2" charset="-78"/>
+                <a:ea typeface="Amiri" pitchFamily="2" charset="-78"/>
                 <a:cs typeface="Amiri" pitchFamily="2" charset="-78"/>
               </a:rPr>
               <a:t>ء</a:t>
@@ -42486,6 +42754,7 @@
                   <a:srgbClr val="1F2A37"/>
                 </a:solidFill>
                 <a:latin typeface="Amiri" pitchFamily="2" charset="-78"/>
+                <a:ea typeface="Amiri" pitchFamily="2" charset="-78"/>
                 <a:cs typeface="Amiri" pitchFamily="2" charset="-78"/>
               </a:rPr>
               <a:t>ه</a:t>
@@ -42634,6 +42903,7 @@
                   <a:srgbClr val="1B3B6F"/>
                 </a:solidFill>
                 <a:latin typeface="Amiri" pitchFamily="2" charset="-78"/>
+                <a:ea typeface="Amiri" pitchFamily="2" charset="-78"/>
                 <a:cs typeface="Amiri" pitchFamily="2" charset="-78"/>
               </a:rPr>
               <a:t>بَ</a:t>
@@ -43193,6 +43463,7 @@
                   <a:srgbClr val="D4AF37"/>
                 </a:solidFill>
                 <a:latin typeface="Amiri" pitchFamily="2" charset="-78"/>
+                <a:ea typeface="Amiri" pitchFamily="2" charset="-78"/>
                 <a:cs typeface="Amiri" pitchFamily="2" charset="-78"/>
               </a:rPr>
               <a:t>م</a:t>
@@ -43513,6 +43784,7 @@
                   <a:srgbClr val="8A6D1E"/>
                 </a:solidFill>
                 <a:latin typeface="Amiri" pitchFamily="2" charset="-78"/>
+                <a:ea typeface="Amiri" pitchFamily="2" charset="-78"/>
                 <a:cs typeface="Amiri" pitchFamily="2" charset="-78"/>
               </a:rPr>
               <a:t>إِجَابَاتُ تَذْكِرَةِ الخُرُوجِ</a:t>
@@ -43699,6 +43971,7 @@
                   <a:srgbClr val="1B3B6F"/>
                 </a:solidFill>
                 <a:latin typeface="Amiri" pitchFamily="2" charset="-78"/>
+                <a:ea typeface="Amiri" pitchFamily="2" charset="-78"/>
                 <a:cs typeface="Amiri" pitchFamily="2" charset="-78"/>
               </a:rPr>
               <a:t>لا</a:t>
@@ -44215,6 +44488,7 @@
                   <a:srgbClr val="9AA1AB"/>
                 </a:solidFill>
                 <a:latin typeface="Amiri" pitchFamily="2" charset="-78"/>
+                <a:ea typeface="Amiri" pitchFamily="2" charset="-78"/>
                 <a:cs typeface="Amiri" pitchFamily="2" charset="-78"/>
               </a:rPr>
               <a:t>ع</a:t>
@@ -44343,6 +44617,7 @@
                   <a:srgbClr val="1F2A37"/>
                 </a:solidFill>
                 <a:latin typeface="Amiri" pitchFamily="2" charset="-78"/>
+                <a:ea typeface="Amiri" pitchFamily="2" charset="-78"/>
                 <a:cs typeface="Amiri" pitchFamily="2" charset="-78"/>
               </a:rPr>
               <a:t>ء</a:t>
@@ -44444,6 +44719,7 @@
                   <a:srgbClr val="9AA1AB"/>
                 </a:solidFill>
                 <a:latin typeface="Amiri" pitchFamily="2" charset="-78"/>
+                <a:ea typeface="Amiri" pitchFamily="2" charset="-78"/>
                 <a:cs typeface="Amiri" pitchFamily="2" charset="-78"/>
               </a:rPr>
               <a:t>ه</a:t>
@@ -44630,6 +44906,7 @@
                   <a:srgbClr val="1B3B6F"/>
                 </a:solidFill>
                 <a:latin typeface="Amiri" pitchFamily="2" charset="-78"/>
+                <a:ea typeface="Amiri" pitchFamily="2" charset="-78"/>
                 <a:cs typeface="Amiri" pitchFamily="2" charset="-78"/>
               </a:rPr>
               <a:t>بَ</a:t>
@@ -45254,6 +45531,7 @@
                   <a:srgbClr val="D4AF37"/>
                 </a:solidFill>
                 <a:latin typeface="Amiri" pitchFamily="2" charset="-78"/>
+                <a:ea typeface="Amiri" pitchFamily="2" charset="-78"/>
                 <a:cs typeface="Amiri" pitchFamily="2" charset="-78"/>
               </a:rPr>
               <a:t>م</a:t>
@@ -45574,6 +45852,7 @@
                   <a:srgbClr val="8A6D1E"/>
                 </a:solidFill>
                 <a:latin typeface="Amiri" pitchFamily="2" charset="-78"/>
+                <a:ea typeface="Amiri" pitchFamily="2" charset="-78"/>
                 <a:cs typeface="Amiri" pitchFamily="2" charset="-78"/>
               </a:rPr>
               <a:t>التَّحْضِيرُ لِلدَّرْسِ القَادِمِ</a:t>
@@ -45787,6 +46066,7 @@
                   <a:srgbClr val="1B3B6F"/>
                 </a:solidFill>
                 <a:latin typeface="Amiri" pitchFamily="2" charset="-78"/>
+                <a:ea typeface="Amiri" pitchFamily="2" charset="-78"/>
                 <a:cs typeface="Amiri" pitchFamily="2" charset="-78"/>
               </a:rPr>
               <a:t>بـ</a:t>
@@ -45866,6 +46146,7 @@
                   <a:srgbClr val="1B3B6F"/>
                 </a:solidFill>
                 <a:latin typeface="Amiri" pitchFamily="2" charset="-78"/>
+                <a:ea typeface="Amiri" pitchFamily="2" charset="-78"/>
                 <a:cs typeface="Amiri" pitchFamily="2" charset="-78"/>
               </a:rPr>
               <a:t>ـبـ</a:t>
@@ -45945,6 +46226,7 @@
                   <a:srgbClr val="1B3B6F"/>
                 </a:solidFill>
                 <a:latin typeface="Amiri" pitchFamily="2" charset="-78"/>
+                <a:ea typeface="Amiri" pitchFamily="2" charset="-78"/>
                 <a:cs typeface="Amiri" pitchFamily="2" charset="-78"/>
               </a:rPr>
               <a:t>ـب</a:t>
@@ -46024,6 +46306,7 @@
                   <a:srgbClr val="1B3B6F"/>
                 </a:solidFill>
                 <a:latin typeface="Amiri" pitchFamily="2" charset="-78"/>
+                <a:ea typeface="Amiri" pitchFamily="2" charset="-78"/>
                 <a:cs typeface="Amiri" pitchFamily="2" charset="-78"/>
               </a:rPr>
               <a:t>كَتَبَ</a:t>
@@ -46103,6 +46386,7 @@
                   <a:srgbClr val="1B3B6F"/>
                 </a:solidFill>
                 <a:latin typeface="Amiri" pitchFamily="2" charset="-78"/>
+                <a:ea typeface="Amiri" pitchFamily="2" charset="-78"/>
                 <a:cs typeface="Amiri" pitchFamily="2" charset="-78"/>
               </a:rPr>
               <a:t>بَيْتٌ</a:t>
@@ -46149,11 +46433,12 @@
               <a:buNone/>
             </a:pPr>
             <a:r>
-              <a:rPr lang="en-US" sz="1000" i="1" dirty="0">
+              <a:rPr lang="ar-SA" sz="1000" i="1" dirty="0">
                 <a:solidFill>
                   <a:srgbClr val="5A6472"/>
                 </a:solidFill>
                 <a:latin typeface="Calibri" pitchFamily="34" charset="0"/>
+                <a:ea typeface="Amiri" pitchFamily="2" charset="-78"/>
                 <a:cs typeface="Amiri" pitchFamily="2" charset="-78"/>
               </a:rPr>
               <a:t>  pl. بُيُوتٌ</a:t>
@@ -46268,6 +46553,7 @@
                   <a:srgbClr val="1B3B6F"/>
                 </a:solidFill>
                 <a:latin typeface="Amiri" pitchFamily="2" charset="-78"/>
+                <a:ea typeface="Amiri" pitchFamily="2" charset="-78"/>
                 <a:cs typeface="Amiri" pitchFamily="2" charset="-78"/>
               </a:rPr>
               <a:t>ا د ذ ر ز و</a:t>
@@ -46456,6 +46742,7 @@
                   <a:srgbClr val="1F2A37"/>
                 </a:solidFill>
                 <a:latin typeface="Amiri" pitchFamily="2" charset="-78"/>
+                <a:ea typeface="Amiri" pitchFamily="2" charset="-78"/>
                 <a:cs typeface="Amiri" pitchFamily="2" charset="-78"/>
               </a:rPr>
               <a:t>بَ بُ بِ بْ</a:t>
@@ -46963,6 +47250,7 @@
                   <a:srgbClr val="FFFFFF"/>
                 </a:solidFill>
                 <a:latin typeface="Amiri" pitchFamily="2" charset="-78"/>
+                <a:ea typeface="Amiri" pitchFamily="2" charset="-78"/>
                 <a:cs typeface="Amiri" pitchFamily="2" charset="-78"/>
               </a:rPr>
               <a:t>أَحْسَنْتُمْ! إِلَى اللِّقَاءِ</a:t>
@@ -47115,6 +47403,7 @@
                   <a:srgbClr val="D4AF37"/>
                 </a:solidFill>
                 <a:latin typeface="Amiri" pitchFamily="2" charset="-78"/>
+                <a:ea typeface="Amiri" pitchFamily="2" charset="-78"/>
                 <a:cs typeface="Amiri" pitchFamily="2" charset="-78"/>
               </a:rPr>
               <a:t>أَشْكَالُ الحُرُوفِ فِي الكَلِمَةِ</a:t>
@@ -47248,6 +47537,7 @@
                   <a:srgbClr val="D4AF37"/>
                 </a:solidFill>
                 <a:latin typeface="Amiri" pitchFamily="2" charset="-78"/>
+                <a:ea typeface="Amiri" pitchFamily="2" charset="-78"/>
                 <a:cs typeface="Amiri" pitchFamily="2" charset="-78"/>
               </a:rPr>
               <a:t>م</a:t>
@@ -47568,6 +47858,7 @@
                   <a:srgbClr val="8A6D1E"/>
                 </a:solidFill>
                 <a:latin typeface="Amiri" pitchFamily="2" charset="-78"/>
+                <a:ea typeface="Amiri" pitchFamily="2" charset="-78"/>
                 <a:cs typeface="Amiri" pitchFamily="2" charset="-78"/>
               </a:rPr>
               <a:t>خَرِيطَةُ الدَّرْسِ</a:t>
@@ -47882,6 +48173,7 @@
                   <a:srgbClr val="0E7C86"/>
                 </a:solidFill>
                 <a:latin typeface="Amiri" pitchFamily="2" charset="-78"/>
+                <a:ea typeface="Amiri" pitchFamily="2" charset="-78"/>
                 <a:cs typeface="Amiri" pitchFamily="2" charset="-78"/>
               </a:rPr>
               <a:t>اِبْدَأِ الآنَ</a:t>
@@ -48158,6 +48450,7 @@
                   <a:srgbClr val="1B3B6F"/>
                 </a:solidFill>
                 <a:latin typeface="Amiri" pitchFamily="2" charset="-78"/>
+                <a:ea typeface="Amiri" pitchFamily="2" charset="-78"/>
                 <a:cs typeface="Amiri" pitchFamily="2" charset="-78"/>
               </a:rPr>
               <a:t>كَلِمَاتٌ وَقَوَاعِدُ</a:t>
@@ -48434,6 +48727,7 @@
                   <a:srgbClr val="6B4C9A"/>
                 </a:solidFill>
                 <a:latin typeface="Amiri" pitchFamily="2" charset="-78"/>
+                <a:ea typeface="Amiri" pitchFamily="2" charset="-78"/>
                 <a:cs typeface="Amiri" pitchFamily="2" charset="-78"/>
               </a:rPr>
               <a:t>شَاهِدْ</a:t>
@@ -48710,6 +49004,7 @@
                   <a:srgbClr val="2F6FB0"/>
                 </a:solidFill>
                 <a:latin typeface="Amiri" pitchFamily="2" charset="-78"/>
+                <a:ea typeface="Amiri" pitchFamily="2" charset="-78"/>
                 <a:cs typeface="Amiri" pitchFamily="2" charset="-78"/>
               </a:rPr>
               <a:t>مَعًا</a:t>
@@ -48986,6 +49281,7 @@
                   <a:srgbClr val="1E6B52"/>
                 </a:solidFill>
                 <a:latin typeface="Amiri" pitchFamily="2" charset="-78"/>
+                <a:ea typeface="Amiri" pitchFamily="2" charset="-78"/>
                 <a:cs typeface="Amiri" pitchFamily="2" charset="-78"/>
               </a:rPr>
               <a:t>وَحْدَكَ</a:t>
@@ -49262,6 +49558,7 @@
                   <a:srgbClr val="8A6D1E"/>
                 </a:solidFill>
                 <a:latin typeface="Amiri" pitchFamily="2" charset="-78"/>
+                <a:ea typeface="Amiri" pitchFamily="2" charset="-78"/>
                 <a:cs typeface="Amiri" pitchFamily="2" charset="-78"/>
               </a:rPr>
               <a:t>قَيِّمْ عَمَلَكَ</a:t>
@@ -49538,6 +49835,7 @@
                   <a:srgbClr val="C45A3C"/>
                 </a:solidFill>
                 <a:latin typeface="Amiri" pitchFamily="2" charset="-78"/>
+                <a:ea typeface="Amiri" pitchFamily="2" charset="-78"/>
                 <a:cs typeface="Amiri" pitchFamily="2" charset="-78"/>
               </a:rPr>
               <a:t>اِسْتَعِدَّ</a:t>
@@ -49781,6 +50079,7 @@
                   <a:srgbClr val="D4AF37"/>
                 </a:solidFill>
                 <a:latin typeface="Amiri" pitchFamily="2" charset="-78"/>
+                <a:ea typeface="Amiri" pitchFamily="2" charset="-78"/>
                 <a:cs typeface="Amiri" pitchFamily="2" charset="-78"/>
               </a:rPr>
               <a:t>م</a:t>
@@ -50101,6 +50400,7 @@
                   <a:srgbClr val="8A6D1E"/>
                 </a:solidFill>
                 <a:latin typeface="Amiri" pitchFamily="2" charset="-78"/>
+                <a:ea typeface="Amiri" pitchFamily="2" charset="-78"/>
                 <a:cs typeface="Amiri" pitchFamily="2" charset="-78"/>
               </a:rPr>
               <a:t>اِبْدَأِ الآنَ</a:t>
@@ -50375,6 +50675,7 @@
                   <a:srgbClr val="1F2A37"/>
                 </a:solidFill>
                 <a:latin typeface="Amiri" pitchFamily="2" charset="-78"/>
+                <a:ea typeface="Amiri" pitchFamily="2" charset="-78"/>
                 <a:cs typeface="Amiri" pitchFamily="2" charset="-78"/>
               </a:rPr>
               <a:t>ق</a:t>
@@ -50476,6 +50777,7 @@
                   <a:srgbClr val="1F2A37"/>
                 </a:solidFill>
                 <a:latin typeface="Amiri" pitchFamily="2" charset="-78"/>
+                <a:ea typeface="Amiri" pitchFamily="2" charset="-78"/>
                 <a:cs typeface="Amiri" pitchFamily="2" charset="-78"/>
               </a:rPr>
               <a:t>ك</a:t>
@@ -50577,6 +50879,7 @@
                   <a:srgbClr val="1F2A37"/>
                 </a:solidFill>
                 <a:latin typeface="Amiri" pitchFamily="2" charset="-78"/>
+                <a:ea typeface="Amiri" pitchFamily="2" charset="-78"/>
                 <a:cs typeface="Amiri" pitchFamily="2" charset="-78"/>
               </a:rPr>
               <a:t>ل</a:t>
@@ -50813,6 +51116,7 @@
                   <a:srgbClr val="1F2A37"/>
                 </a:solidFill>
                 <a:latin typeface="Amiri" pitchFamily="2" charset="-78"/>
+                <a:ea typeface="Amiri" pitchFamily="2" charset="-78"/>
                 <a:cs typeface="Amiri" pitchFamily="2" charset="-78"/>
               </a:rPr>
               <a:t>غ</a:t>
@@ -50914,6 +51218,7 @@
                   <a:srgbClr val="1F2A37"/>
                 </a:solidFill>
                 <a:latin typeface="Amiri" pitchFamily="2" charset="-78"/>
+                <a:ea typeface="Amiri" pitchFamily="2" charset="-78"/>
                 <a:cs typeface="Amiri" pitchFamily="2" charset="-78"/>
               </a:rPr>
               <a:t>ع</a:t>
@@ -51015,6 +51320,7 @@
                   <a:srgbClr val="1F2A37"/>
                 </a:solidFill>
                 <a:latin typeface="Amiri" pitchFamily="2" charset="-78"/>
+                <a:ea typeface="Amiri" pitchFamily="2" charset="-78"/>
                 <a:cs typeface="Amiri" pitchFamily="2" charset="-78"/>
               </a:rPr>
               <a:t>ف</a:t>
@@ -51251,6 +51557,7 @@
                   <a:srgbClr val="1F2A37"/>
                 </a:solidFill>
                 <a:latin typeface="Amiri" pitchFamily="2" charset="-78"/>
+                <a:ea typeface="Amiri" pitchFamily="2" charset="-78"/>
                 <a:cs typeface="Amiri" pitchFamily="2" charset="-78"/>
               </a:rPr>
               <a:t>ا</a:t>
@@ -51352,6 +51659,7 @@
                   <a:srgbClr val="1F2A37"/>
                 </a:solidFill>
                 <a:latin typeface="Amiri" pitchFamily="2" charset="-78"/>
+                <a:ea typeface="Amiri" pitchFamily="2" charset="-78"/>
                 <a:cs typeface="Amiri" pitchFamily="2" charset="-78"/>
               </a:rPr>
               <a:t>ي</a:t>
@@ -51453,6 +51761,7 @@
                   <a:srgbClr val="1F2A37"/>
                 </a:solidFill>
                 <a:latin typeface="Amiri" pitchFamily="2" charset="-78"/>
+                <a:ea typeface="Amiri" pitchFamily="2" charset="-78"/>
                 <a:cs typeface="Amiri" pitchFamily="2" charset="-78"/>
               </a:rPr>
               <a:t>و</a:t>
@@ -52026,6 +52335,7 @@
                   <a:srgbClr val="1F2A37"/>
                 </a:solidFill>
                 <a:latin typeface="Amiri" pitchFamily="2" charset="-78"/>
+                <a:ea typeface="Amiri" pitchFamily="2" charset="-78"/>
                 <a:cs typeface="Amiri" pitchFamily="2" charset="-78"/>
               </a:rPr>
               <a:t>م</a:t>
@@ -52127,6 +52437,7 @@
                   <a:srgbClr val="1F2A37"/>
                 </a:solidFill>
                 <a:latin typeface="Amiri" pitchFamily="2" charset="-78"/>
+                <a:ea typeface="Amiri" pitchFamily="2" charset="-78"/>
                 <a:cs typeface="Amiri" pitchFamily="2" charset="-78"/>
               </a:rPr>
               <a:t>ن</a:t>
@@ -52228,6 +52539,7 @@
                   <a:srgbClr val="1F2A37"/>
                 </a:solidFill>
                 <a:latin typeface="Amiri" pitchFamily="2" charset="-78"/>
+                <a:ea typeface="Amiri" pitchFamily="2" charset="-78"/>
                 <a:cs typeface="Amiri" pitchFamily="2" charset="-78"/>
               </a:rPr>
               <a:t>ل</a:t>
@@ -52563,6 +52875,7 @@
                   <a:srgbClr val="D4AF37"/>
                 </a:solidFill>
                 <a:latin typeface="Amiri" pitchFamily="2" charset="-78"/>
+                <a:ea typeface="Amiri" pitchFamily="2" charset="-78"/>
                 <a:cs typeface="Amiri" pitchFamily="2" charset="-78"/>
               </a:rPr>
               <a:t>م</a:t>
@@ -52883,6 +53196,7 @@
                   <a:srgbClr val="8A6D1E"/>
                 </a:solidFill>
                 <a:latin typeface="Amiri" pitchFamily="2" charset="-78"/>
+                <a:ea typeface="Amiri" pitchFamily="2" charset="-78"/>
                 <a:cs typeface="Amiri" pitchFamily="2" charset="-78"/>
               </a:rPr>
               <a:t>الإِجَابَاتُ وَالتَّعْلِيلُ</a:t>
@@ -53157,6 +53471,7 @@
                   <a:srgbClr val="9AA1AB"/>
                 </a:solidFill>
                 <a:latin typeface="Amiri" pitchFamily="2" charset="-78"/>
+                <a:ea typeface="Amiri" pitchFamily="2" charset="-78"/>
                 <a:cs typeface="Amiri" pitchFamily="2" charset="-78"/>
               </a:rPr>
               <a:t>ق</a:t>
@@ -53285,6 +53600,7 @@
                   <a:srgbClr val="1F2A37"/>
                 </a:solidFill>
                 <a:latin typeface="Amiri" pitchFamily="2" charset="-78"/>
+                <a:ea typeface="Amiri" pitchFamily="2" charset="-78"/>
                 <a:cs typeface="Amiri" pitchFamily="2" charset="-78"/>
               </a:rPr>
               <a:t>ك</a:t>
@@ -53386,6 +53702,7 @@
                   <a:srgbClr val="9AA1AB"/>
                 </a:solidFill>
                 <a:latin typeface="Amiri" pitchFamily="2" charset="-78"/>
+                <a:ea typeface="Amiri" pitchFamily="2" charset="-78"/>
                 <a:cs typeface="Amiri" pitchFamily="2" charset="-78"/>
               </a:rPr>
               <a:t>ل</a:t>
@@ -53437,6 +53754,7 @@
                   <a:srgbClr val="8A6D1E"/>
                 </a:solidFill>
                 <a:latin typeface="Amiri" pitchFamily="2" charset="-78"/>
+                <a:ea typeface="Amiri" pitchFamily="2" charset="-78"/>
                 <a:cs typeface="Amiri" pitchFamily="2" charset="-78"/>
               </a:rPr>
               <a:t>ك</a:t>
@@ -53713,6 +54031,7 @@
                   <a:srgbClr val="1F2A37"/>
                 </a:solidFill>
                 <a:latin typeface="Amiri" pitchFamily="2" charset="-78"/>
+                <a:ea typeface="Amiri" pitchFamily="2" charset="-78"/>
                 <a:cs typeface="Amiri" pitchFamily="2" charset="-78"/>
               </a:rPr>
               <a:t>غ</a:t>
@@ -53814,6 +54133,7 @@
                   <a:srgbClr val="9AA1AB"/>
                 </a:solidFill>
                 <a:latin typeface="Amiri" pitchFamily="2" charset="-78"/>
+                <a:ea typeface="Amiri" pitchFamily="2" charset="-78"/>
                 <a:cs typeface="Amiri" pitchFamily="2" charset="-78"/>
               </a:rPr>
               <a:t>ع</a:t>
@@ -53915,6 +54235,7 @@
                   <a:srgbClr val="9AA1AB"/>
                 </a:solidFill>
                 <a:latin typeface="Amiri" pitchFamily="2" charset="-78"/>
+                <a:ea typeface="Amiri" pitchFamily="2" charset="-78"/>
                 <a:cs typeface="Amiri" pitchFamily="2" charset="-78"/>
               </a:rPr>
               <a:t>ف</a:t>
@@ -53953,6 +54274,7 @@
                   <a:srgbClr val="8A6D1E"/>
                 </a:solidFill>
                 <a:latin typeface="Amiri" pitchFamily="2" charset="-78"/>
+                <a:ea typeface="Amiri" pitchFamily="2" charset="-78"/>
                 <a:cs typeface="Amiri" pitchFamily="2" charset="-78"/>
               </a:rPr>
               <a:t>غ</a:t>
@@ -54202,6 +54524,7 @@
                   <a:srgbClr val="9AA1AB"/>
                 </a:solidFill>
                 <a:latin typeface="Amiri" pitchFamily="2" charset="-78"/>
+                <a:ea typeface="Amiri" pitchFamily="2" charset="-78"/>
                 <a:cs typeface="Amiri" pitchFamily="2" charset="-78"/>
               </a:rPr>
               <a:t>ا</a:t>
@@ -54303,6 +54626,7 @@
                   <a:srgbClr val="9AA1AB"/>
                 </a:solidFill>
                 <a:latin typeface="Amiri" pitchFamily="2" charset="-78"/>
+                <a:ea typeface="Amiri" pitchFamily="2" charset="-78"/>
                 <a:cs typeface="Amiri" pitchFamily="2" charset="-78"/>
               </a:rPr>
               <a:t>ي</a:t>
@@ -54431,6 +54755,7 @@
                   <a:srgbClr val="1F2A37"/>
                 </a:solidFill>
                 <a:latin typeface="Amiri" pitchFamily="2" charset="-78"/>
+                <a:ea typeface="Amiri" pitchFamily="2" charset="-78"/>
                 <a:cs typeface="Amiri" pitchFamily="2" charset="-78"/>
               </a:rPr>
               <a:t>و</a:t>
@@ -55134,6 +55459,7 @@
                   <a:srgbClr val="1F2A37"/>
                 </a:solidFill>
                 <a:latin typeface="Amiri" pitchFamily="2" charset="-78"/>
+                <a:ea typeface="Amiri" pitchFamily="2" charset="-78"/>
                 <a:cs typeface="Amiri" pitchFamily="2" charset="-78"/>
               </a:rPr>
               <a:t>م</a:t>
@@ -55235,6 +55561,7 @@
                   <a:srgbClr val="9AA1AB"/>
                 </a:solidFill>
                 <a:latin typeface="Amiri" pitchFamily="2" charset="-78"/>
+                <a:ea typeface="Amiri" pitchFamily="2" charset="-78"/>
                 <a:cs typeface="Amiri" pitchFamily="2" charset="-78"/>
               </a:rPr>
               <a:t>ن</a:t>
@@ -55336,6 +55663,7 @@
                   <a:srgbClr val="9AA1AB"/>
                 </a:solidFill>
                 <a:latin typeface="Amiri" pitchFamily="2" charset="-78"/>
+                <a:ea typeface="Amiri" pitchFamily="2" charset="-78"/>
                 <a:cs typeface="Amiri" pitchFamily="2" charset="-78"/>
               </a:rPr>
               <a:t>ل</a:t>
@@ -55387,6 +55715,7 @@
                   <a:srgbClr val="8A6D1E"/>
                 </a:solidFill>
                 <a:latin typeface="Amiri" pitchFamily="2" charset="-78"/>
+                <a:ea typeface="Amiri" pitchFamily="2" charset="-78"/>
                 <a:cs typeface="Amiri" pitchFamily="2" charset="-78"/>
               </a:rPr>
               <a:t>م</a:t>
@@ -55548,6 +55877,7 @@
                   <a:srgbClr val="1B3B6F"/>
                 </a:solidFill>
                 <a:latin typeface="Amiri" pitchFamily="2" charset="-78"/>
+                <a:ea typeface="Amiri" pitchFamily="2" charset="-78"/>
                 <a:cs typeface="Amiri" pitchFamily="2" charset="-78"/>
               </a:rPr>
               <a:t>بَ   بُ   بِ   بْ</a:t>
@@ -55681,6 +56011,7 @@
                   <a:srgbClr val="D4AF37"/>
                 </a:solidFill>
                 <a:latin typeface="Amiri" pitchFamily="2" charset="-78"/>
+                <a:ea typeface="Amiri" pitchFamily="2" charset="-78"/>
                 <a:cs typeface="Amiri" pitchFamily="2" charset="-78"/>
               </a:rPr>
               <a:t>م</a:t>
@@ -56001,6 +56332,7 @@
                   <a:srgbClr val="8A6D1E"/>
                 </a:solidFill>
                 <a:latin typeface="Amiri" pitchFamily="2" charset="-78"/>
+                <a:ea typeface="Amiri" pitchFamily="2" charset="-78"/>
                 <a:cs typeface="Amiri" pitchFamily="2" charset="-78"/>
               </a:rPr>
               <a:t>الأَهْدَافُ وَمَعَايِيرُ النَّجَاحِ</a:t>
@@ -56149,6 +56481,7 @@
                   <a:srgbClr val="8A6D1E"/>
                 </a:solidFill>
                 <a:latin typeface="Amiri" pitchFamily="2" charset="-78"/>
+                <a:ea typeface="Amiri" pitchFamily="2" charset="-78"/>
                 <a:cs typeface="Amiri" pitchFamily="2" charset="-78"/>
               </a:rPr>
               <a:t>سَتَتَعَلَّمُ اليَوْمَ</a:t>
@@ -56364,6 +56697,7 @@
                   <a:srgbClr val="1F2A37"/>
                 </a:solidFill>
                 <a:latin typeface="Amiri" pitchFamily="2" charset="-78"/>
+                <a:ea typeface="Amiri" pitchFamily="2" charset="-78"/>
                 <a:cs typeface="Amiri" pitchFamily="2" charset="-78"/>
               </a:rPr>
               <a:t>و</a:t>
@@ -56390,6 +56724,7 @@
                   <a:srgbClr val="1F2A37"/>
                 </a:solidFill>
                 <a:latin typeface="Amiri" pitchFamily="2" charset="-78"/>
+                <a:ea typeface="Amiri" pitchFamily="2" charset="-78"/>
                 <a:cs typeface="Amiri" pitchFamily="2" charset="-78"/>
               </a:rPr>
               <a:t>ي</a:t>
@@ -56517,6 +56852,7 @@
                   <a:srgbClr val="1F2A37"/>
                 </a:solidFill>
                 <a:latin typeface="Amiri" pitchFamily="2" charset="-78"/>
+                <a:ea typeface="Amiri" pitchFamily="2" charset="-78"/>
                 <a:cs typeface="Amiri" pitchFamily="2" charset="-78"/>
               </a:rPr>
               <a:t>لا</a:t>
@@ -56543,6 +56879,7 @@
                   <a:srgbClr val="1F2A37"/>
                 </a:solidFill>
                 <a:latin typeface="Amiri" pitchFamily="2" charset="-78"/>
+                <a:ea typeface="Amiri" pitchFamily="2" charset="-78"/>
                 <a:cs typeface="Amiri" pitchFamily="2" charset="-78"/>
               </a:rPr>
               <a:t>ء</a:t>
@@ -56876,6 +57213,7 @@
                   <a:srgbClr val="2E8B57"/>
                 </a:solidFill>
                 <a:latin typeface="Amiri" pitchFamily="2" charset="-78"/>
+                <a:ea typeface="Amiri" pitchFamily="2" charset="-78"/>
                 <a:cs typeface="Amiri" pitchFamily="2" charset="-78"/>
               </a:rPr>
               <a:t>بَ بُ بِ بْ</a:t>
@@ -57108,6 +57446,7 @@
                   <a:srgbClr val="C9780A"/>
                 </a:solidFill>
                 <a:latin typeface="Amiri" pitchFamily="2" charset="-78"/>
+                <a:ea typeface="Amiri" pitchFamily="2" charset="-78"/>
                 <a:cs typeface="Amiri" pitchFamily="2" charset="-78"/>
               </a:rPr>
               <a:t>و</a:t>
@@ -57134,6 +57473,7 @@
                   <a:srgbClr val="C9780A"/>
                 </a:solidFill>
                 <a:latin typeface="Amiri" pitchFamily="2" charset="-78"/>
+                <a:ea typeface="Amiri" pitchFamily="2" charset="-78"/>
                 <a:cs typeface="Amiri" pitchFamily="2" charset="-78"/>
               </a:rPr>
               <a:t>ي</a:t>
@@ -57589,6 +57929,7 @@
                   <a:srgbClr val="D4AF37"/>
                 </a:solidFill>
                 <a:latin typeface="Amiri" pitchFamily="2" charset="-78"/>
+                <a:ea typeface="Amiri" pitchFamily="2" charset="-78"/>
                 <a:cs typeface="Amiri" pitchFamily="2" charset="-78"/>
               </a:rPr>
               <a:t>كَلِمَاتُ الدَّرْسِ</a:t>
@@ -57784,11 +58125,12 @@
               <a:buNone/>
             </a:pPr>
             <a:r>
-              <a:rPr lang="en-US" sz="1200" b="1" dirty="0">
+              <a:rPr lang="ar-SA" sz="1200" b="1" dirty="0">
                 <a:solidFill>
                   <a:srgbClr val="FFFFFF"/>
                 </a:solidFill>
                 <a:latin typeface="Calibri" pitchFamily="34" charset="0"/>
+                <a:ea typeface="Amiri" pitchFamily="2" charset="-78"/>
                 <a:cs typeface="Amiri" pitchFamily="2" charset="-78"/>
               </a:rPr>
               <a:t>لا and ء · 2</a:t>
@@ -57973,6 +58315,7 @@
                   <a:srgbClr val="1B3B6F"/>
                 </a:solidFill>
                 <a:latin typeface="Amiri" pitchFamily="2" charset="-78"/>
+                <a:ea typeface="Amiri" pitchFamily="2" charset="-78"/>
                 <a:cs typeface="Amiri" pitchFamily="2" charset="-78"/>
               </a:rPr>
               <a:t>فَتْحَةٌ</a:t>
@@ -58006,11 +58349,12 @@
               <a:buNone/>
             </a:pPr>
             <a:r>
-              <a:rPr lang="ur-PK" altLang="en-US" sz="1400" b="1" dirty="0">
+              <a:rPr lang="ar-SA" altLang="en-US" sz="1400" b="1" dirty="0">
                 <a:solidFill>
                   <a:srgbClr val="2E8B57"/>
                 </a:solidFill>
                 <a:latin typeface="Amiri" pitchFamily="2" charset="-78"/>
+                <a:ea typeface="Amiri" pitchFamily="2" charset="-78"/>
                 <a:cs typeface="Amiri" pitchFamily="2" charset="-78"/>
               </a:rPr>
               <a:t>‎زبر‎ </a:t>
@@ -58062,6 +58406,7 @@
                   <a:srgbClr val="1B3B6F"/>
                 </a:solidFill>
                 <a:latin typeface="Amiri" pitchFamily="2" charset="-78"/>
+                <a:ea typeface="Amiri" pitchFamily="2" charset="-78"/>
                 <a:cs typeface="Amiri" pitchFamily="2" charset="-78"/>
               </a:rPr>
               <a:t>ضَمَّةٌ</a:t>
@@ -58095,11 +58440,12 @@
               <a:buNone/>
             </a:pPr>
             <a:r>
-              <a:rPr lang="ur-PK" altLang="en-US" sz="1400" b="1" dirty="0">
+              <a:rPr lang="ar-SA" altLang="en-US" sz="1400" b="1" dirty="0">
                 <a:solidFill>
                   <a:srgbClr val="2E8B57"/>
                 </a:solidFill>
                 <a:latin typeface="Amiri" pitchFamily="2" charset="-78"/>
+                <a:ea typeface="Amiri" pitchFamily="2" charset="-78"/>
                 <a:cs typeface="Amiri" pitchFamily="2" charset="-78"/>
               </a:rPr>
               <a:t>‎پیش‎ </a:t>
@@ -58151,6 +58497,7 @@
                   <a:srgbClr val="1B3B6F"/>
                 </a:solidFill>
                 <a:latin typeface="Amiri" pitchFamily="2" charset="-78"/>
+                <a:ea typeface="Amiri" pitchFamily="2" charset="-78"/>
                 <a:cs typeface="Amiri" pitchFamily="2" charset="-78"/>
               </a:rPr>
               <a:t>كَسْرَةٌ</a:t>
@@ -58184,11 +58531,12 @@
               <a:buNone/>
             </a:pPr>
             <a:r>
-              <a:rPr lang="ur-PK" altLang="en-US" sz="1400" b="1" dirty="0">
+              <a:rPr lang="ar-SA" altLang="en-US" sz="1400" b="1" dirty="0">
                 <a:solidFill>
                   <a:srgbClr val="2E8B57"/>
                 </a:solidFill>
                 <a:latin typeface="Amiri" pitchFamily="2" charset="-78"/>
+                <a:ea typeface="Amiri" pitchFamily="2" charset="-78"/>
                 <a:cs typeface="Amiri" pitchFamily="2" charset="-78"/>
               </a:rPr>
               <a:t>‎زیر‎ </a:t>
@@ -58240,6 +58588,7 @@
                   <a:srgbClr val="1B3B6F"/>
                 </a:solidFill>
                 <a:latin typeface="Amiri" pitchFamily="2" charset="-78"/>
+                <a:ea typeface="Amiri" pitchFamily="2" charset="-78"/>
                 <a:cs typeface="Amiri" pitchFamily="2" charset="-78"/>
               </a:rPr>
               <a:t>سُكُونٌ</a:t>
@@ -58273,11 +58622,12 @@
               <a:buNone/>
             </a:pPr>
             <a:r>
-              <a:rPr lang="ur-PK" altLang="en-US" sz="1400" b="1" dirty="0">
+              <a:rPr lang="ar-SA" altLang="en-US" sz="1400" b="1" dirty="0">
                 <a:solidFill>
                   <a:srgbClr val="2E8B57"/>
                 </a:solidFill>
                 <a:latin typeface="Amiri" pitchFamily="2" charset="-78"/>
+                <a:ea typeface="Amiri" pitchFamily="2" charset="-78"/>
                 <a:cs typeface="Amiri" pitchFamily="2" charset="-78"/>
               </a:rPr>
               <a:t>‎جزم‎ </a:t>
@@ -58329,6 +58679,7 @@
                   <a:srgbClr val="1B3B6F"/>
                 </a:solidFill>
                 <a:latin typeface="Amiri" pitchFamily="2" charset="-78"/>
+                <a:ea typeface="Amiri" pitchFamily="2" charset="-78"/>
                 <a:cs typeface="Amiri" pitchFamily="2" charset="-78"/>
               </a:rPr>
               <a:t>هَمْزَةٌ</a:t>
@@ -58362,11 +58713,12 @@
               <a:buNone/>
             </a:pPr>
             <a:r>
-              <a:rPr lang="ur-PK" altLang="en-US" sz="1400" b="1" dirty="0">
+              <a:rPr lang="ar-SA" altLang="en-US" sz="1400" b="1" dirty="0">
                 <a:solidFill>
                   <a:srgbClr val="2E8B57"/>
                 </a:solidFill>
                 <a:latin typeface="Amiri" pitchFamily="2" charset="-78"/>
+                <a:ea typeface="Amiri" pitchFamily="2" charset="-78"/>
                 <a:cs typeface="Amiri" pitchFamily="2" charset="-78"/>
               </a:rPr>
               <a:t>‎ہمزہ‎ </a:t>
@@ -58513,6 +58865,7 @@
                   <a:srgbClr val="D4AF37"/>
                 </a:solidFill>
                 <a:latin typeface="Amiri" pitchFamily="2" charset="-78"/>
+                <a:ea typeface="Amiri" pitchFamily="2" charset="-78"/>
                 <a:cs typeface="Amiri" pitchFamily="2" charset="-78"/>
               </a:rPr>
               <a:t>م</a:t>
@@ -58833,6 +59186,7 @@
                   <a:srgbClr val="8A6D1E"/>
                 </a:solidFill>
                 <a:latin typeface="Amiri" pitchFamily="2" charset="-78"/>
+                <a:ea typeface="Amiri" pitchFamily="2" charset="-78"/>
                 <a:cs typeface="Amiri" pitchFamily="2" charset="-78"/>
               </a:rPr>
               <a:t>آخِرُ سِتَّةِ حُرُوفٍ</a:t>
@@ -59136,6 +59490,7 @@
                   <a:srgbClr val="1B3B6F"/>
                 </a:solidFill>
                 <a:latin typeface="Amiri" pitchFamily="2" charset="-78"/>
+                <a:ea typeface="Amiri" pitchFamily="2" charset="-78"/>
                 <a:cs typeface="Amiri" pitchFamily="2" charset="-78"/>
               </a:rPr>
               <a:t>ل</a:t>
@@ -59293,6 +59648,7 @@
                   <a:srgbClr val="1B3B6F"/>
                 </a:solidFill>
                 <a:latin typeface="Amiri" pitchFamily="2" charset="-78"/>
+                <a:ea typeface="Amiri" pitchFamily="2" charset="-78"/>
                 <a:cs typeface="Amiri" pitchFamily="2" charset="-78"/>
               </a:rPr>
               <a:t>لَامٌ</a:t>
@@ -59558,6 +59914,7 @@
                   <a:srgbClr val="1B3B6F"/>
                 </a:solidFill>
                 <a:latin typeface="Amiri" pitchFamily="2" charset="-78"/>
+                <a:ea typeface="Amiri" pitchFamily="2" charset="-78"/>
                 <a:cs typeface="Amiri" pitchFamily="2" charset="-78"/>
               </a:rPr>
               <a:t>م</a:t>
@@ -59715,6 +60072,7 @@
                   <a:srgbClr val="1B3B6F"/>
                 </a:solidFill>
                 <a:latin typeface="Amiri" pitchFamily="2" charset="-78"/>
+                <a:ea typeface="Amiri" pitchFamily="2" charset="-78"/>
                 <a:cs typeface="Amiri" pitchFamily="2" charset="-78"/>
               </a:rPr>
               <a:t>مِيمٌ</a:t>
@@ -59980,6 +60338,7 @@
                   <a:srgbClr val="1B3B6F"/>
                 </a:solidFill>
                 <a:latin typeface="Amiri" pitchFamily="2" charset="-78"/>
+                <a:ea typeface="Amiri" pitchFamily="2" charset="-78"/>
                 <a:cs typeface="Amiri" pitchFamily="2" charset="-78"/>
               </a:rPr>
               <a:t>ن</a:t>
@@ -60137,6 +60496,7 @@
                   <a:srgbClr val="1B3B6F"/>
                 </a:solidFill>
                 <a:latin typeface="Amiri" pitchFamily="2" charset="-78"/>
+                <a:ea typeface="Amiri" pitchFamily="2" charset="-78"/>
                 <a:cs typeface="Amiri" pitchFamily="2" charset="-78"/>
               </a:rPr>
               <a:t>نُونٌ</a:t>
@@ -60402,6 +60762,7 @@
                   <a:srgbClr val="1B3B6F"/>
                 </a:solidFill>
                 <a:latin typeface="Amiri" pitchFamily="2" charset="-78"/>
+                <a:ea typeface="Amiri" pitchFamily="2" charset="-78"/>
                 <a:cs typeface="Amiri" pitchFamily="2" charset="-78"/>
               </a:rPr>
               <a:t>ه</a:t>
@@ -60559,6 +60920,7 @@
                   <a:srgbClr val="1B3B6F"/>
                 </a:solidFill>
                 <a:latin typeface="Amiri" pitchFamily="2" charset="-78"/>
+                <a:ea typeface="Amiri" pitchFamily="2" charset="-78"/>
                 <a:cs typeface="Amiri" pitchFamily="2" charset="-78"/>
               </a:rPr>
               <a:t>هَاءٌ</a:t>
@@ -60824,6 +61186,7 @@
                   <a:srgbClr val="1B3B6F"/>
                 </a:solidFill>
                 <a:latin typeface="Amiri" pitchFamily="2" charset="-78"/>
+                <a:ea typeface="Amiri" pitchFamily="2" charset="-78"/>
                 <a:cs typeface="Amiri" pitchFamily="2" charset="-78"/>
               </a:rPr>
               <a:t>و</a:t>
@@ -60981,6 +61344,7 @@
                   <a:srgbClr val="1B3B6F"/>
                 </a:solidFill>
                 <a:latin typeface="Amiri" pitchFamily="2" charset="-78"/>
+                <a:ea typeface="Amiri" pitchFamily="2" charset="-78"/>
                 <a:cs typeface="Amiri" pitchFamily="2" charset="-78"/>
               </a:rPr>
               <a:t>وَاوٌ</a:t>
@@ -61246,6 +61610,7 @@
                   <a:srgbClr val="1B3B6F"/>
                 </a:solidFill>
                 <a:latin typeface="Amiri" pitchFamily="2" charset="-78"/>
+                <a:ea typeface="Amiri" pitchFamily="2" charset="-78"/>
                 <a:cs typeface="Amiri" pitchFamily="2" charset="-78"/>
               </a:rPr>
               <a:t>ي</a:t>
@@ -61403,6 +61768,7 @@
                   <a:srgbClr val="1B3B6F"/>
                 </a:solidFill>
                 <a:latin typeface="Amiri" pitchFamily="2" charset="-78"/>
+                <a:ea typeface="Amiri" pitchFamily="2" charset="-78"/>
                 <a:cs typeface="Amiri" pitchFamily="2" charset="-78"/>
               </a:rPr>
               <a:t>يَاءٌ</a:t>
@@ -61536,6 +61902,7 @@
                   <a:srgbClr val="D4AF37"/>
                 </a:solidFill>
                 <a:latin typeface="Amiri" pitchFamily="2" charset="-78"/>
+                <a:ea typeface="Amiri" pitchFamily="2" charset="-78"/>
                 <a:cs typeface="Amiri" pitchFamily="2" charset="-78"/>
               </a:rPr>
               <a:t>م</a:t>
@@ -61856,6 +62223,7 @@
                   <a:srgbClr val="8A6D1E"/>
                 </a:solidFill>
                 <a:latin typeface="Amiri" pitchFamily="2" charset="-78"/>
+                <a:ea typeface="Amiri" pitchFamily="2" charset="-78"/>
                 <a:cs typeface="Amiri" pitchFamily="2" charset="-78"/>
               </a:rPr>
               <a:t>الوَاوُ وَاليَاءُ</a:t>
@@ -61988,11 +62356,12 @@
               <a:buNone/>
             </a:pPr>
             <a:r>
-              <a:rPr lang="en-US" sz="850" b="1" spc="100" kern="0" dirty="0">
+              <a:rPr lang="ar-SA" sz="850" b="1" spc="100" kern="0" dirty="0">
                 <a:solidFill>
                   <a:srgbClr val="FFFFFF"/>
                 </a:solidFill>
                 <a:latin typeface="Calibri" pitchFamily="34" charset="0"/>
+                <a:ea typeface="Amiri" pitchFamily="2" charset="-78"/>
                 <a:cs typeface="Amiri" pitchFamily="2" charset="-78"/>
               </a:rPr>
               <a:t>و · CONSONANT</a:t>
@@ -62069,6 +62438,7 @@
                   <a:srgbClr val="1B3B6F"/>
                 </a:solidFill>
                 <a:latin typeface="Amiri" pitchFamily="2" charset="-78"/>
+                <a:ea typeface="Amiri" pitchFamily="2" charset="-78"/>
                 <a:cs typeface="Amiri" pitchFamily="2" charset="-78"/>
               </a:rPr>
               <a:t>وَ</a:t>
@@ -62185,6 +62555,7 @@
                   <a:srgbClr val="1F2A37"/>
                 </a:solidFill>
                 <a:latin typeface="Amiri" pitchFamily="2" charset="-78"/>
+                <a:ea typeface="Amiri" pitchFamily="2" charset="-78"/>
                 <a:cs typeface="Amiri" pitchFamily="2" charset="-78"/>
               </a:rPr>
               <a:t>بُو</a:t>
@@ -62292,11 +62663,12 @@
               <a:buNone/>
             </a:pPr>
             <a:r>
-              <a:rPr lang="en-US" sz="850" b="1" spc="100" kern="0" dirty="0">
+              <a:rPr lang="ar-SA" sz="850" b="1" spc="100" kern="0" dirty="0">
                 <a:solidFill>
                   <a:srgbClr val="FFFFFF"/>
                 </a:solidFill>
                 <a:latin typeface="Calibri" pitchFamily="34" charset="0"/>
+                <a:ea typeface="Amiri" pitchFamily="2" charset="-78"/>
                 <a:cs typeface="Amiri" pitchFamily="2" charset="-78"/>
               </a:rPr>
               <a:t>ي · CONSONANT</a:t>
@@ -62373,6 +62745,7 @@
                   <a:srgbClr val="1B3B6F"/>
                 </a:solidFill>
                 <a:latin typeface="Amiri" pitchFamily="2" charset="-78"/>
+                <a:ea typeface="Amiri" pitchFamily="2" charset="-78"/>
                 <a:cs typeface="Amiri" pitchFamily="2" charset="-78"/>
               </a:rPr>
               <a:t>يَ</a:t>
@@ -62489,6 +62862,7 @@
                   <a:srgbClr val="1F2A37"/>
                 </a:solidFill>
                 <a:latin typeface="Amiri" pitchFamily="2" charset="-78"/>
+                <a:ea typeface="Amiri" pitchFamily="2" charset="-78"/>
                 <a:cs typeface="Amiri" pitchFamily="2" charset="-78"/>
               </a:rPr>
               <a:t>بِي</a:t>
@@ -62639,6 +63013,7 @@
                   <a:srgbClr val="8A6D1E"/>
                 </a:solidFill>
                 <a:latin typeface="Amiri" pitchFamily="2" charset="-78"/>
+                <a:ea typeface="Amiri" pitchFamily="2" charset="-78"/>
                 <a:cs typeface="Amiri" pitchFamily="2" charset="-78"/>
               </a:rPr>
               <a:t>ا د ذ ر ز و</a:t>
@@ -62677,6 +63052,7 @@
                   <a:srgbClr val="1B3B6F"/>
                 </a:solidFill>
                 <a:latin typeface="Amiri" pitchFamily="2" charset="-78"/>
+                <a:ea typeface="Amiri" pitchFamily="2" charset="-78"/>
                 <a:cs typeface="Amiri" pitchFamily="2" charset="-78"/>
               </a:rPr>
               <a:t>ا د ذ ر ز و</a:t>
@@ -62780,6 +63156,7 @@
                   <a:srgbClr val="1F2A37"/>
                 </a:solidFill>
                 <a:latin typeface="Amiri" pitchFamily="2" charset="-78"/>
+                <a:ea typeface="Amiri" pitchFamily="2" charset="-78"/>
                 <a:cs typeface="Amiri" pitchFamily="2" charset="-78"/>
               </a:rPr>
               <a:t>ي</a:t>
@@ -62891,13 +63268,9 @@
     <a:fontScheme name="Office">
       <a:majorFont>
         <a:latin typeface="Calibri Light" panose="020F0302020204030204"/>
-        <a:ea typeface=""/>
-        <a:cs typeface=""/>
-        <a:font script="Jpan" typeface="游ゴシック Light"/>
-        <a:font script="Hang" typeface="맑은 고딕"/>
-        <a:font script="Hans" typeface="等线 Light"/>
-        <a:font script="Hant" typeface="新細明體"/>
-        <a:font script="Arab" typeface="Times New Roman"/>
+        <a:ea typeface="Amiri" pitchFamily="2" charset="-78"/>
+        <a:cs typeface="Amiri" pitchFamily="2" charset="-78"/>
+        <a:font script="Arab" typeface="Amiri"/>
         <a:font script="Hebr" typeface="Times New Roman"/>
         <a:font script="Thai" typeface="Angsana New"/>
         <a:font script="Ethi" typeface="Nyala"/>
@@ -62943,13 +63316,9 @@
       </a:majorFont>
       <a:minorFont>
         <a:latin typeface="Calibri" panose="020F0502020204030204"/>
-        <a:ea typeface=""/>
-        <a:cs typeface=""/>
-        <a:font script="Jpan" typeface="游ゴシック"/>
-        <a:font script="Hang" typeface="맑은 고딕"/>
-        <a:font script="Hans" typeface="等线"/>
-        <a:font script="Hant" typeface="新細明體"/>
-        <a:font script="Arab" typeface="Arial"/>
+        <a:ea typeface="Amiri" pitchFamily="2" charset="-78"/>
+        <a:cs typeface="Amiri" pitchFamily="2" charset="-78"/>
+        <a:font script="Arab" typeface="Amiri"/>
         <a:font script="Hebr" typeface="Arial"/>
         <a:font script="Thai" typeface="Cordia New"/>
         <a:font script="Ethi" typeface="Nyala"/>
